--- a/mega2_html/Article/Mega2Rfig2.pptx
+++ b/mega2_html/Article/Mega2Rfig2.pptx
@@ -1,20 +1,20 @@
 
 <file path=ppt/presentation.xml><?xml version="1.0" encoding="utf-8"?>
-<p:presentation xmlns:a="http://schemas.openxmlformats.org/drawingml/2006/main" xmlns:r="http://schemas.openxmlformats.org/officeDocument/2006/relationships" xmlns:mc="http://schemas.openxmlformats.org/markup-compatibility/2006" xmlns:mv="urn:schemas-microsoft-com:mac:vml" xmlns:p="http://schemas.openxmlformats.org/presentationml/2006/main" mc:Ignorable="mv" mc:PreserveAttributes="mv:*" saveSubsetFonts="1" autoCompressPictures="0">
+<p:presentation xmlns:a="http://schemas.openxmlformats.org/drawingml/2006/main" xmlns:r="http://schemas.openxmlformats.org/officeDocument/2006/relationships" xmlns:p="http://schemas.openxmlformats.org/presentationml/2006/main" saveSubsetFonts="1" autoCompressPictures="0">
   <p:sldMasterIdLst>
     <p:sldMasterId id="2147483648" r:id="rId1"/>
   </p:sldMasterIdLst>
   <p:sldIdLst>
     <p:sldId id="256" r:id="rId2"/>
   </p:sldIdLst>
-  <p:sldSz cx="9144000" cy="6858000" type="screen4x3"/>
+  <p:sldSz cx="3657600" cy="3657600"/>
   <p:notesSz cx="6858000" cy="9144000"/>
   <p:defaultTextStyle>
     <a:defPPr>
       <a:defRPr lang="en-US"/>
     </a:defPPr>
-    <a:lvl1pPr marL="0" algn="l" defTabSz="457200" rtl="0" eaLnBrk="1" latinLnBrk="0" hangingPunct="1">
-      <a:defRPr sz="1800" kern="1200">
+    <a:lvl1pPr marL="0" algn="l" defTabSz="208986" rtl="0" eaLnBrk="1" latinLnBrk="0" hangingPunct="1">
+      <a:defRPr sz="800" kern="1200">
         <a:solidFill>
           <a:schemeClr val="tx1"/>
         </a:solidFill>
@@ -23,8 +23,8 @@
         <a:cs typeface="+mn-cs"/>
       </a:defRPr>
     </a:lvl1pPr>
-    <a:lvl2pPr marL="457200" algn="l" defTabSz="457200" rtl="0" eaLnBrk="1" latinLnBrk="0" hangingPunct="1">
-      <a:defRPr sz="1800" kern="1200">
+    <a:lvl2pPr marL="208986" algn="l" defTabSz="208986" rtl="0" eaLnBrk="1" latinLnBrk="0" hangingPunct="1">
+      <a:defRPr sz="800" kern="1200">
         <a:solidFill>
           <a:schemeClr val="tx1"/>
         </a:solidFill>
@@ -33,8 +33,8 @@
         <a:cs typeface="+mn-cs"/>
       </a:defRPr>
     </a:lvl2pPr>
-    <a:lvl3pPr marL="914400" algn="l" defTabSz="457200" rtl="0" eaLnBrk="1" latinLnBrk="0" hangingPunct="1">
-      <a:defRPr sz="1800" kern="1200">
+    <a:lvl3pPr marL="417972" algn="l" defTabSz="208986" rtl="0" eaLnBrk="1" latinLnBrk="0" hangingPunct="1">
+      <a:defRPr sz="800" kern="1200">
         <a:solidFill>
           <a:schemeClr val="tx1"/>
         </a:solidFill>
@@ -43,8 +43,8 @@
         <a:cs typeface="+mn-cs"/>
       </a:defRPr>
     </a:lvl3pPr>
-    <a:lvl4pPr marL="1371600" algn="l" defTabSz="457200" rtl="0" eaLnBrk="1" latinLnBrk="0" hangingPunct="1">
-      <a:defRPr sz="1800" kern="1200">
+    <a:lvl4pPr marL="626958" algn="l" defTabSz="208986" rtl="0" eaLnBrk="1" latinLnBrk="0" hangingPunct="1">
+      <a:defRPr sz="800" kern="1200">
         <a:solidFill>
           <a:schemeClr val="tx1"/>
         </a:solidFill>
@@ -53,8 +53,8 @@
         <a:cs typeface="+mn-cs"/>
       </a:defRPr>
     </a:lvl4pPr>
-    <a:lvl5pPr marL="1828800" algn="l" defTabSz="457200" rtl="0" eaLnBrk="1" latinLnBrk="0" hangingPunct="1">
-      <a:defRPr sz="1800" kern="1200">
+    <a:lvl5pPr marL="835944" algn="l" defTabSz="208986" rtl="0" eaLnBrk="1" latinLnBrk="0" hangingPunct="1">
+      <a:defRPr sz="800" kern="1200">
         <a:solidFill>
           <a:schemeClr val="tx1"/>
         </a:solidFill>
@@ -63,8 +63,8 @@
         <a:cs typeface="+mn-cs"/>
       </a:defRPr>
     </a:lvl5pPr>
-    <a:lvl6pPr marL="2286000" algn="l" defTabSz="457200" rtl="0" eaLnBrk="1" latinLnBrk="0" hangingPunct="1">
-      <a:defRPr sz="1800" kern="1200">
+    <a:lvl6pPr marL="1044931" algn="l" defTabSz="208986" rtl="0" eaLnBrk="1" latinLnBrk="0" hangingPunct="1">
+      <a:defRPr sz="800" kern="1200">
         <a:solidFill>
           <a:schemeClr val="tx1"/>
         </a:solidFill>
@@ -73,8 +73,8 @@
         <a:cs typeface="+mn-cs"/>
       </a:defRPr>
     </a:lvl6pPr>
-    <a:lvl7pPr marL="2743200" algn="l" defTabSz="457200" rtl="0" eaLnBrk="1" latinLnBrk="0" hangingPunct="1">
-      <a:defRPr sz="1800" kern="1200">
+    <a:lvl7pPr marL="1253917" algn="l" defTabSz="208986" rtl="0" eaLnBrk="1" latinLnBrk="0" hangingPunct="1">
+      <a:defRPr sz="800" kern="1200">
         <a:solidFill>
           <a:schemeClr val="tx1"/>
         </a:solidFill>
@@ -83,8 +83,8 @@
         <a:cs typeface="+mn-cs"/>
       </a:defRPr>
     </a:lvl7pPr>
-    <a:lvl8pPr marL="3200400" algn="l" defTabSz="457200" rtl="0" eaLnBrk="1" latinLnBrk="0" hangingPunct="1">
-      <a:defRPr sz="1800" kern="1200">
+    <a:lvl8pPr marL="1462903" algn="l" defTabSz="208986" rtl="0" eaLnBrk="1" latinLnBrk="0" hangingPunct="1">
+      <a:defRPr sz="800" kern="1200">
         <a:solidFill>
           <a:schemeClr val="tx1"/>
         </a:solidFill>
@@ -93,8 +93,8 @@
         <a:cs typeface="+mn-cs"/>
       </a:defRPr>
     </a:lvl8pPr>
-    <a:lvl9pPr marL="3657600" algn="l" defTabSz="457200" rtl="0" eaLnBrk="1" latinLnBrk="0" hangingPunct="1">
-      <a:defRPr sz="1800" kern="1200">
+    <a:lvl9pPr marL="1671889" algn="l" defTabSz="208986" rtl="0" eaLnBrk="1" latinLnBrk="0" hangingPunct="1">
+      <a:defRPr sz="800" kern="1200">
         <a:solidFill>
           <a:schemeClr val="tx1"/>
         </a:solidFill>
@@ -108,7 +108,7 @@
 </file>
 
 <file path=ppt/slideLayouts/slideLayout1.xml><?xml version="1.0" encoding="utf-8"?>
-<p:sldLayout xmlns:a="http://schemas.openxmlformats.org/drawingml/2006/main" xmlns:r="http://schemas.openxmlformats.org/officeDocument/2006/relationships" xmlns:mc="http://schemas.openxmlformats.org/markup-compatibility/2006" xmlns:mv="urn:schemas-microsoft-com:mac:vml" xmlns:p="http://schemas.openxmlformats.org/presentationml/2006/main" mc:Ignorable="mv" mc:PreserveAttributes="mv:*" type="title" preserve="1">
+<p:sldLayout xmlns:a="http://schemas.openxmlformats.org/drawingml/2006/main" xmlns:r="http://schemas.openxmlformats.org/officeDocument/2006/relationships" xmlns:p="http://schemas.openxmlformats.org/presentationml/2006/main" type="title" preserve="1">
   <p:cSld name="Title Slide">
     <p:spTree>
       <p:nvGrpSpPr>
@@ -136,8 +136,8 @@
         </p:nvSpPr>
         <p:spPr>
           <a:xfrm>
-            <a:off x="685800" y="2130425"/>
-            <a:ext cx="7772400" cy="1470025"/>
+            <a:off x="274320" y="1136227"/>
+            <a:ext cx="3108960" cy="784013"/>
           </a:xfrm>
         </p:spPr>
         <p:txBody>
@@ -164,8 +164,8 @@
         </p:nvSpPr>
         <p:spPr>
           <a:xfrm>
-            <a:off x="1371600" y="3886200"/>
-            <a:ext cx="6400800" cy="1752600"/>
+            <a:off x="548640" y="2072640"/>
+            <a:ext cx="2560320" cy="934720"/>
           </a:xfrm>
         </p:spPr>
         <p:txBody>
@@ -181,7 +181,7 @@
                 </a:solidFill>
               </a:defRPr>
             </a:lvl1pPr>
-            <a:lvl2pPr marL="457200" indent="0" algn="ctr">
+            <a:lvl2pPr marL="208986" indent="0" algn="ctr">
               <a:buNone/>
               <a:defRPr>
                 <a:solidFill>
@@ -191,7 +191,7 @@
                 </a:solidFill>
               </a:defRPr>
             </a:lvl2pPr>
-            <a:lvl3pPr marL="914400" indent="0" algn="ctr">
+            <a:lvl3pPr marL="417972" indent="0" algn="ctr">
               <a:buNone/>
               <a:defRPr>
                 <a:solidFill>
@@ -201,7 +201,7 @@
                 </a:solidFill>
               </a:defRPr>
             </a:lvl3pPr>
-            <a:lvl4pPr marL="1371600" indent="0" algn="ctr">
+            <a:lvl4pPr marL="626958" indent="0" algn="ctr">
               <a:buNone/>
               <a:defRPr>
                 <a:solidFill>
@@ -211,7 +211,7 @@
                 </a:solidFill>
               </a:defRPr>
             </a:lvl4pPr>
-            <a:lvl5pPr marL="1828800" indent="0" algn="ctr">
+            <a:lvl5pPr marL="835944" indent="0" algn="ctr">
               <a:buNone/>
               <a:defRPr>
                 <a:solidFill>
@@ -221,7 +221,7 @@
                 </a:solidFill>
               </a:defRPr>
             </a:lvl5pPr>
-            <a:lvl6pPr marL="2286000" indent="0" algn="ctr">
+            <a:lvl6pPr marL="1044931" indent="0" algn="ctr">
               <a:buNone/>
               <a:defRPr>
                 <a:solidFill>
@@ -231,7 +231,7 @@
                 </a:solidFill>
               </a:defRPr>
             </a:lvl6pPr>
-            <a:lvl7pPr marL="2743200" indent="0" algn="ctr">
+            <a:lvl7pPr marL="1253917" indent="0" algn="ctr">
               <a:buNone/>
               <a:defRPr>
                 <a:solidFill>
@@ -241,7 +241,7 @@
                 </a:solidFill>
               </a:defRPr>
             </a:lvl7pPr>
-            <a:lvl8pPr marL="3200400" indent="0" algn="ctr">
+            <a:lvl8pPr marL="1462903" indent="0" algn="ctr">
               <a:buNone/>
               <a:defRPr>
                 <a:solidFill>
@@ -251,7 +251,7 @@
                 </a:solidFill>
               </a:defRPr>
             </a:lvl8pPr>
-            <a:lvl9pPr marL="3657600" indent="0" algn="ctr">
+            <a:lvl9pPr marL="1671889" indent="0" algn="ctr">
               <a:buNone/>
               <a:defRPr>
                 <a:solidFill>
@@ -289,7 +289,7 @@
             <a:fld id="{7AE4F870-186A-EB4F-9838-041FBD4EA0A4}" type="datetimeFigureOut">
               <a:rPr lang="en-US" smtClean="0"/>
               <a:pPr/>
-              <a:t>12/11/18</a:t>
+              <a:t>1/16/19</a:t>
             </a:fld>
             <a:endParaRPr lang="en-US"/>
           </a:p>
@@ -347,7 +347,7 @@
 </file>
 
 <file path=ppt/slideLayouts/slideLayout10.xml><?xml version="1.0" encoding="utf-8"?>
-<p:sldLayout xmlns:a="http://schemas.openxmlformats.org/drawingml/2006/main" xmlns:r="http://schemas.openxmlformats.org/officeDocument/2006/relationships" xmlns:mc="http://schemas.openxmlformats.org/markup-compatibility/2006" xmlns:mv="urn:schemas-microsoft-com:mac:vml" xmlns:p="http://schemas.openxmlformats.org/presentationml/2006/main" mc:Ignorable="mv" mc:PreserveAttributes="mv:*" type="vertTx" preserve="1">
+<p:sldLayout xmlns:a="http://schemas.openxmlformats.org/drawingml/2006/main" xmlns:r="http://schemas.openxmlformats.org/officeDocument/2006/relationships" xmlns:p="http://schemas.openxmlformats.org/presentationml/2006/main" type="vertTx" preserve="1">
   <p:cSld name="Title and Vertical Text">
     <p:spTree>
       <p:nvGrpSpPr>
@@ -456,7 +456,7 @@
             <a:fld id="{7AE4F870-186A-EB4F-9838-041FBD4EA0A4}" type="datetimeFigureOut">
               <a:rPr lang="en-US" smtClean="0"/>
               <a:pPr/>
-              <a:t>12/11/18</a:t>
+              <a:t>1/16/19</a:t>
             </a:fld>
             <a:endParaRPr lang="en-US"/>
           </a:p>
@@ -514,7 +514,7 @@
 </file>
 
 <file path=ppt/slideLayouts/slideLayout11.xml><?xml version="1.0" encoding="utf-8"?>
-<p:sldLayout xmlns:a="http://schemas.openxmlformats.org/drawingml/2006/main" xmlns:r="http://schemas.openxmlformats.org/officeDocument/2006/relationships" xmlns:mc="http://schemas.openxmlformats.org/markup-compatibility/2006" xmlns:mv="urn:schemas-microsoft-com:mac:vml" xmlns:p="http://schemas.openxmlformats.org/presentationml/2006/main" mc:Ignorable="mv" mc:PreserveAttributes="mv:*" type="vertTitleAndTx" preserve="1">
+<p:sldLayout xmlns:a="http://schemas.openxmlformats.org/drawingml/2006/main" xmlns:r="http://schemas.openxmlformats.org/officeDocument/2006/relationships" xmlns:p="http://schemas.openxmlformats.org/presentationml/2006/main" type="vertTitleAndTx" preserve="1">
   <p:cSld name="Vertical Title and Text">
     <p:spTree>
       <p:nvGrpSpPr>
@@ -542,8 +542,8 @@
         </p:nvSpPr>
         <p:spPr>
           <a:xfrm>
-            <a:off x="6629400" y="274638"/>
-            <a:ext cx="2057400" cy="5851525"/>
+            <a:off x="2651760" y="146474"/>
+            <a:ext cx="822960" cy="3120813"/>
           </a:xfrm>
         </p:spPr>
         <p:txBody>
@@ -570,8 +570,8 @@
         </p:nvSpPr>
         <p:spPr>
           <a:xfrm>
-            <a:off x="457200" y="274638"/>
-            <a:ext cx="6019800" cy="5851525"/>
+            <a:off x="182880" y="146474"/>
+            <a:ext cx="2407920" cy="3120813"/>
           </a:xfrm>
         </p:spPr>
         <p:txBody>
@@ -633,7 +633,7 @@
             <a:fld id="{7AE4F870-186A-EB4F-9838-041FBD4EA0A4}" type="datetimeFigureOut">
               <a:rPr lang="en-US" smtClean="0"/>
               <a:pPr/>
-              <a:t>12/11/18</a:t>
+              <a:t>1/16/19</a:t>
             </a:fld>
             <a:endParaRPr lang="en-US"/>
           </a:p>
@@ -691,7 +691,7 @@
 </file>
 
 <file path=ppt/slideLayouts/slideLayout2.xml><?xml version="1.0" encoding="utf-8"?>
-<p:sldLayout xmlns:a="http://schemas.openxmlformats.org/drawingml/2006/main" xmlns:r="http://schemas.openxmlformats.org/officeDocument/2006/relationships" xmlns:mc="http://schemas.openxmlformats.org/markup-compatibility/2006" xmlns:mv="urn:schemas-microsoft-com:mac:vml" xmlns:p="http://schemas.openxmlformats.org/presentationml/2006/main" mc:Ignorable="mv" mc:PreserveAttributes="mv:*" type="obj" preserve="1">
+<p:sldLayout xmlns:a="http://schemas.openxmlformats.org/drawingml/2006/main" xmlns:r="http://schemas.openxmlformats.org/officeDocument/2006/relationships" xmlns:p="http://schemas.openxmlformats.org/presentationml/2006/main" type="obj" preserve="1">
   <p:cSld name="Title and Content">
     <p:spTree>
       <p:nvGrpSpPr>
@@ -800,7 +800,7 @@
             <a:fld id="{7AE4F870-186A-EB4F-9838-041FBD4EA0A4}" type="datetimeFigureOut">
               <a:rPr lang="en-US" smtClean="0"/>
               <a:pPr/>
-              <a:t>12/11/18</a:t>
+              <a:t>1/16/19</a:t>
             </a:fld>
             <a:endParaRPr lang="en-US"/>
           </a:p>
@@ -858,7 +858,7 @@
 </file>
 
 <file path=ppt/slideLayouts/slideLayout3.xml><?xml version="1.0" encoding="utf-8"?>
-<p:sldLayout xmlns:a="http://schemas.openxmlformats.org/drawingml/2006/main" xmlns:r="http://schemas.openxmlformats.org/officeDocument/2006/relationships" xmlns:mc="http://schemas.openxmlformats.org/markup-compatibility/2006" xmlns:mv="urn:schemas-microsoft-com:mac:vml" xmlns:p="http://schemas.openxmlformats.org/presentationml/2006/main" mc:Ignorable="mv" mc:PreserveAttributes="mv:*" type="secHead" preserve="1">
+<p:sldLayout xmlns:a="http://schemas.openxmlformats.org/drawingml/2006/main" xmlns:r="http://schemas.openxmlformats.org/officeDocument/2006/relationships" xmlns:p="http://schemas.openxmlformats.org/presentationml/2006/main" type="secHead" preserve="1">
   <p:cSld name="Section Header">
     <p:spTree>
       <p:nvGrpSpPr>
@@ -886,15 +886,15 @@
         </p:nvSpPr>
         <p:spPr>
           <a:xfrm>
-            <a:off x="722313" y="4406900"/>
-            <a:ext cx="7772400" cy="1362075"/>
+            <a:off x="288925" y="2350347"/>
+            <a:ext cx="3108960" cy="726440"/>
           </a:xfrm>
         </p:spPr>
         <p:txBody>
           <a:bodyPr anchor="t"/>
           <a:lstStyle>
             <a:lvl1pPr algn="l">
-              <a:defRPr sz="4000" b="1" cap="all"/>
+              <a:defRPr sz="1800" b="1" cap="all"/>
             </a:lvl1pPr>
           </a:lstStyle>
           <a:p>
@@ -918,8 +918,8 @@
         </p:nvSpPr>
         <p:spPr>
           <a:xfrm>
-            <a:off x="722313" y="2906713"/>
-            <a:ext cx="7772400" cy="1500187"/>
+            <a:off x="288925" y="1550247"/>
+            <a:ext cx="3108960" cy="800100"/>
           </a:xfrm>
         </p:spPr>
         <p:txBody>
@@ -927,7 +927,7 @@
           <a:lstStyle>
             <a:lvl1pPr marL="0" indent="0">
               <a:buNone/>
-              <a:defRPr sz="2000">
+              <a:defRPr sz="900">
                 <a:solidFill>
                   <a:schemeClr val="tx1">
                     <a:tint val="75000"/>
@@ -935,9 +935,9 @@
                 </a:solidFill>
               </a:defRPr>
             </a:lvl1pPr>
-            <a:lvl2pPr marL="457200" indent="0">
-              <a:buNone/>
-              <a:defRPr sz="1800">
+            <a:lvl2pPr marL="208986" indent="0">
+              <a:buNone/>
+              <a:defRPr sz="800">
                 <a:solidFill>
                   <a:schemeClr val="tx1">
                     <a:tint val="75000"/>
@@ -945,9 +945,9 @@
                 </a:solidFill>
               </a:defRPr>
             </a:lvl2pPr>
-            <a:lvl3pPr marL="914400" indent="0">
-              <a:buNone/>
-              <a:defRPr sz="1600">
+            <a:lvl3pPr marL="417972" indent="0">
+              <a:buNone/>
+              <a:defRPr sz="700">
                 <a:solidFill>
                   <a:schemeClr val="tx1">
                     <a:tint val="75000"/>
@@ -955,9 +955,9 @@
                 </a:solidFill>
               </a:defRPr>
             </a:lvl3pPr>
-            <a:lvl4pPr marL="1371600" indent="0">
-              <a:buNone/>
-              <a:defRPr sz="1400">
+            <a:lvl4pPr marL="626958" indent="0">
+              <a:buNone/>
+              <a:defRPr sz="600">
                 <a:solidFill>
                   <a:schemeClr val="tx1">
                     <a:tint val="75000"/>
@@ -965,9 +965,9 @@
                 </a:solidFill>
               </a:defRPr>
             </a:lvl4pPr>
-            <a:lvl5pPr marL="1828800" indent="0">
-              <a:buNone/>
-              <a:defRPr sz="1400">
+            <a:lvl5pPr marL="835944" indent="0">
+              <a:buNone/>
+              <a:defRPr sz="600">
                 <a:solidFill>
                   <a:schemeClr val="tx1">
                     <a:tint val="75000"/>
@@ -975,9 +975,9 @@
                 </a:solidFill>
               </a:defRPr>
             </a:lvl5pPr>
-            <a:lvl6pPr marL="2286000" indent="0">
-              <a:buNone/>
-              <a:defRPr sz="1400">
+            <a:lvl6pPr marL="1044931" indent="0">
+              <a:buNone/>
+              <a:defRPr sz="600">
                 <a:solidFill>
                   <a:schemeClr val="tx1">
                     <a:tint val="75000"/>
@@ -985,9 +985,9 @@
                 </a:solidFill>
               </a:defRPr>
             </a:lvl6pPr>
-            <a:lvl7pPr marL="2743200" indent="0">
-              <a:buNone/>
-              <a:defRPr sz="1400">
+            <a:lvl7pPr marL="1253917" indent="0">
+              <a:buNone/>
+              <a:defRPr sz="600">
                 <a:solidFill>
                   <a:schemeClr val="tx1">
                     <a:tint val="75000"/>
@@ -995,9 +995,9 @@
                 </a:solidFill>
               </a:defRPr>
             </a:lvl7pPr>
-            <a:lvl8pPr marL="3200400" indent="0">
-              <a:buNone/>
-              <a:defRPr sz="1400">
+            <a:lvl8pPr marL="1462903" indent="0">
+              <a:buNone/>
+              <a:defRPr sz="600">
                 <a:solidFill>
                   <a:schemeClr val="tx1">
                     <a:tint val="75000"/>
@@ -1005,9 +1005,9 @@
                 </a:solidFill>
               </a:defRPr>
             </a:lvl8pPr>
-            <a:lvl9pPr marL="3657600" indent="0">
-              <a:buNone/>
-              <a:defRPr sz="1400">
+            <a:lvl9pPr marL="1671889" indent="0">
+              <a:buNone/>
+              <a:defRPr sz="600">
                 <a:solidFill>
                   <a:schemeClr val="tx1">
                     <a:tint val="75000"/>
@@ -1043,7 +1043,7 @@
             <a:fld id="{7AE4F870-186A-EB4F-9838-041FBD4EA0A4}" type="datetimeFigureOut">
               <a:rPr lang="en-US" smtClean="0"/>
               <a:pPr/>
-              <a:t>12/11/18</a:t>
+              <a:t>1/16/19</a:t>
             </a:fld>
             <a:endParaRPr lang="en-US"/>
           </a:p>
@@ -1101,7 +1101,7 @@
 </file>
 
 <file path=ppt/slideLayouts/slideLayout4.xml><?xml version="1.0" encoding="utf-8"?>
-<p:sldLayout xmlns:a="http://schemas.openxmlformats.org/drawingml/2006/main" xmlns:r="http://schemas.openxmlformats.org/officeDocument/2006/relationships" xmlns:mc="http://schemas.openxmlformats.org/markup-compatibility/2006" xmlns:mv="urn:schemas-microsoft-com:mac:vml" xmlns:p="http://schemas.openxmlformats.org/presentationml/2006/main" mc:Ignorable="mv" mc:PreserveAttributes="mv:*" type="twoObj" preserve="1">
+<p:sldLayout xmlns:a="http://schemas.openxmlformats.org/drawingml/2006/main" xmlns:r="http://schemas.openxmlformats.org/officeDocument/2006/relationships" xmlns:p="http://schemas.openxmlformats.org/presentationml/2006/main" type="twoObj" preserve="1">
   <p:cSld name="Two Content">
     <p:spTree>
       <p:nvGrpSpPr>
@@ -1152,39 +1152,39 @@
         </p:nvSpPr>
         <p:spPr>
           <a:xfrm>
-            <a:off x="457200" y="1600200"/>
-            <a:ext cx="4038600" cy="4525963"/>
+            <a:off x="182880" y="853440"/>
+            <a:ext cx="1615440" cy="2413847"/>
           </a:xfrm>
         </p:spPr>
         <p:txBody>
           <a:bodyPr/>
           <a:lstStyle>
             <a:lvl1pPr>
-              <a:defRPr sz="2800"/>
+              <a:defRPr sz="1300"/>
             </a:lvl1pPr>
             <a:lvl2pPr>
-              <a:defRPr sz="2400"/>
+              <a:defRPr sz="1100"/>
             </a:lvl2pPr>
             <a:lvl3pPr>
-              <a:defRPr sz="2000"/>
+              <a:defRPr sz="900"/>
             </a:lvl3pPr>
             <a:lvl4pPr>
-              <a:defRPr sz="1800"/>
+              <a:defRPr sz="800"/>
             </a:lvl4pPr>
             <a:lvl5pPr>
-              <a:defRPr sz="1800"/>
+              <a:defRPr sz="800"/>
             </a:lvl5pPr>
             <a:lvl6pPr>
-              <a:defRPr sz="1800"/>
+              <a:defRPr sz="800"/>
             </a:lvl6pPr>
             <a:lvl7pPr>
-              <a:defRPr sz="1800"/>
+              <a:defRPr sz="800"/>
             </a:lvl7pPr>
             <a:lvl8pPr>
-              <a:defRPr sz="1800"/>
+              <a:defRPr sz="800"/>
             </a:lvl8pPr>
             <a:lvl9pPr>
-              <a:defRPr sz="1800"/>
+              <a:defRPr sz="800"/>
             </a:lvl9pPr>
           </a:lstStyle>
           <a:p>
@@ -1237,39 +1237,39 @@
         </p:nvSpPr>
         <p:spPr>
           <a:xfrm>
-            <a:off x="4648200" y="1600200"/>
-            <a:ext cx="4038600" cy="4525963"/>
+            <a:off x="1859280" y="853440"/>
+            <a:ext cx="1615440" cy="2413847"/>
           </a:xfrm>
         </p:spPr>
         <p:txBody>
           <a:bodyPr/>
           <a:lstStyle>
             <a:lvl1pPr>
-              <a:defRPr sz="2800"/>
+              <a:defRPr sz="1300"/>
             </a:lvl1pPr>
             <a:lvl2pPr>
-              <a:defRPr sz="2400"/>
+              <a:defRPr sz="1100"/>
             </a:lvl2pPr>
             <a:lvl3pPr>
-              <a:defRPr sz="2000"/>
+              <a:defRPr sz="900"/>
             </a:lvl3pPr>
             <a:lvl4pPr>
-              <a:defRPr sz="1800"/>
+              <a:defRPr sz="800"/>
             </a:lvl4pPr>
             <a:lvl5pPr>
-              <a:defRPr sz="1800"/>
+              <a:defRPr sz="800"/>
             </a:lvl5pPr>
             <a:lvl6pPr>
-              <a:defRPr sz="1800"/>
+              <a:defRPr sz="800"/>
             </a:lvl6pPr>
             <a:lvl7pPr>
-              <a:defRPr sz="1800"/>
+              <a:defRPr sz="800"/>
             </a:lvl7pPr>
             <a:lvl8pPr>
-              <a:defRPr sz="1800"/>
+              <a:defRPr sz="800"/>
             </a:lvl8pPr>
             <a:lvl9pPr>
-              <a:defRPr sz="1800"/>
+              <a:defRPr sz="800"/>
             </a:lvl9pPr>
           </a:lstStyle>
           <a:p>
@@ -1328,7 +1328,7 @@
             <a:fld id="{7AE4F870-186A-EB4F-9838-041FBD4EA0A4}" type="datetimeFigureOut">
               <a:rPr lang="en-US" smtClean="0"/>
               <a:pPr/>
-              <a:t>12/11/18</a:t>
+              <a:t>1/16/19</a:t>
             </a:fld>
             <a:endParaRPr lang="en-US"/>
           </a:p>
@@ -1386,7 +1386,7 @@
 </file>
 
 <file path=ppt/slideLayouts/slideLayout5.xml><?xml version="1.0" encoding="utf-8"?>
-<p:sldLayout xmlns:a="http://schemas.openxmlformats.org/drawingml/2006/main" xmlns:r="http://schemas.openxmlformats.org/officeDocument/2006/relationships" xmlns:mc="http://schemas.openxmlformats.org/markup-compatibility/2006" xmlns:mv="urn:schemas-microsoft-com:mac:vml" xmlns:p="http://schemas.openxmlformats.org/presentationml/2006/main" mc:Ignorable="mv" mc:PreserveAttributes="mv:*" type="twoTxTwoObj" preserve="1">
+<p:sldLayout xmlns:a="http://schemas.openxmlformats.org/drawingml/2006/main" xmlns:r="http://schemas.openxmlformats.org/officeDocument/2006/relationships" xmlns:p="http://schemas.openxmlformats.org/presentationml/2006/main" type="twoTxTwoObj" preserve="1">
   <p:cSld name="Comparison">
     <p:spTree>
       <p:nvGrpSpPr>
@@ -1441,8 +1441,8 @@
         </p:nvSpPr>
         <p:spPr>
           <a:xfrm>
-            <a:off x="457200" y="1535113"/>
-            <a:ext cx="4040188" cy="639762"/>
+            <a:off x="182880" y="818727"/>
+            <a:ext cx="1616075" cy="341206"/>
           </a:xfrm>
         </p:spPr>
         <p:txBody>
@@ -1450,39 +1450,39 @@
           <a:lstStyle>
             <a:lvl1pPr marL="0" indent="0">
               <a:buNone/>
-              <a:defRPr sz="2400" b="1"/>
+              <a:defRPr sz="1100" b="1"/>
             </a:lvl1pPr>
-            <a:lvl2pPr marL="457200" indent="0">
-              <a:buNone/>
-              <a:defRPr sz="2000" b="1"/>
+            <a:lvl2pPr marL="208986" indent="0">
+              <a:buNone/>
+              <a:defRPr sz="900" b="1"/>
             </a:lvl2pPr>
-            <a:lvl3pPr marL="914400" indent="0">
-              <a:buNone/>
-              <a:defRPr sz="1800" b="1"/>
+            <a:lvl3pPr marL="417972" indent="0">
+              <a:buNone/>
+              <a:defRPr sz="800" b="1"/>
             </a:lvl3pPr>
-            <a:lvl4pPr marL="1371600" indent="0">
-              <a:buNone/>
-              <a:defRPr sz="1600" b="1"/>
+            <a:lvl4pPr marL="626958" indent="0">
+              <a:buNone/>
+              <a:defRPr sz="700" b="1"/>
             </a:lvl4pPr>
-            <a:lvl5pPr marL="1828800" indent="0">
-              <a:buNone/>
-              <a:defRPr sz="1600" b="1"/>
+            <a:lvl5pPr marL="835944" indent="0">
+              <a:buNone/>
+              <a:defRPr sz="700" b="1"/>
             </a:lvl5pPr>
-            <a:lvl6pPr marL="2286000" indent="0">
-              <a:buNone/>
-              <a:defRPr sz="1600" b="1"/>
+            <a:lvl6pPr marL="1044931" indent="0">
+              <a:buNone/>
+              <a:defRPr sz="700" b="1"/>
             </a:lvl6pPr>
-            <a:lvl7pPr marL="2743200" indent="0">
-              <a:buNone/>
-              <a:defRPr sz="1600" b="1"/>
+            <a:lvl7pPr marL="1253917" indent="0">
+              <a:buNone/>
+              <a:defRPr sz="700" b="1"/>
             </a:lvl7pPr>
-            <a:lvl8pPr marL="3200400" indent="0">
-              <a:buNone/>
-              <a:defRPr sz="1600" b="1"/>
+            <a:lvl8pPr marL="1462903" indent="0">
+              <a:buNone/>
+              <a:defRPr sz="700" b="1"/>
             </a:lvl8pPr>
-            <a:lvl9pPr marL="3657600" indent="0">
-              <a:buNone/>
-              <a:defRPr sz="1600" b="1"/>
+            <a:lvl9pPr marL="1671889" indent="0">
+              <a:buNone/>
+              <a:defRPr sz="700" b="1"/>
             </a:lvl9pPr>
           </a:lstStyle>
           <a:p>
@@ -1506,39 +1506,39 @@
         </p:nvSpPr>
         <p:spPr>
           <a:xfrm>
-            <a:off x="457200" y="2174875"/>
-            <a:ext cx="4040188" cy="3951288"/>
+            <a:off x="182880" y="1159933"/>
+            <a:ext cx="1616075" cy="2107354"/>
           </a:xfrm>
         </p:spPr>
         <p:txBody>
           <a:bodyPr/>
           <a:lstStyle>
             <a:lvl1pPr>
-              <a:defRPr sz="2400"/>
+              <a:defRPr sz="1100"/>
             </a:lvl1pPr>
             <a:lvl2pPr>
-              <a:defRPr sz="2000"/>
+              <a:defRPr sz="900"/>
             </a:lvl2pPr>
             <a:lvl3pPr>
-              <a:defRPr sz="1800"/>
+              <a:defRPr sz="800"/>
             </a:lvl3pPr>
             <a:lvl4pPr>
-              <a:defRPr sz="1600"/>
+              <a:defRPr sz="700"/>
             </a:lvl4pPr>
             <a:lvl5pPr>
-              <a:defRPr sz="1600"/>
+              <a:defRPr sz="700"/>
             </a:lvl5pPr>
             <a:lvl6pPr>
-              <a:defRPr sz="1600"/>
+              <a:defRPr sz="700"/>
             </a:lvl6pPr>
             <a:lvl7pPr>
-              <a:defRPr sz="1600"/>
+              <a:defRPr sz="700"/>
             </a:lvl7pPr>
             <a:lvl8pPr>
-              <a:defRPr sz="1600"/>
+              <a:defRPr sz="700"/>
             </a:lvl8pPr>
             <a:lvl9pPr>
-              <a:defRPr sz="1600"/>
+              <a:defRPr sz="700"/>
             </a:lvl9pPr>
           </a:lstStyle>
           <a:p>
@@ -1591,8 +1591,8 @@
         </p:nvSpPr>
         <p:spPr>
           <a:xfrm>
-            <a:off x="4645025" y="1535113"/>
-            <a:ext cx="4041775" cy="639762"/>
+            <a:off x="1858010" y="818727"/>
+            <a:ext cx="1616710" cy="341206"/>
           </a:xfrm>
         </p:spPr>
         <p:txBody>
@@ -1600,39 +1600,39 @@
           <a:lstStyle>
             <a:lvl1pPr marL="0" indent="0">
               <a:buNone/>
-              <a:defRPr sz="2400" b="1"/>
+              <a:defRPr sz="1100" b="1"/>
             </a:lvl1pPr>
-            <a:lvl2pPr marL="457200" indent="0">
-              <a:buNone/>
-              <a:defRPr sz="2000" b="1"/>
+            <a:lvl2pPr marL="208986" indent="0">
+              <a:buNone/>
+              <a:defRPr sz="900" b="1"/>
             </a:lvl2pPr>
-            <a:lvl3pPr marL="914400" indent="0">
-              <a:buNone/>
-              <a:defRPr sz="1800" b="1"/>
+            <a:lvl3pPr marL="417972" indent="0">
+              <a:buNone/>
+              <a:defRPr sz="800" b="1"/>
             </a:lvl3pPr>
-            <a:lvl4pPr marL="1371600" indent="0">
-              <a:buNone/>
-              <a:defRPr sz="1600" b="1"/>
+            <a:lvl4pPr marL="626958" indent="0">
+              <a:buNone/>
+              <a:defRPr sz="700" b="1"/>
             </a:lvl4pPr>
-            <a:lvl5pPr marL="1828800" indent="0">
-              <a:buNone/>
-              <a:defRPr sz="1600" b="1"/>
+            <a:lvl5pPr marL="835944" indent="0">
+              <a:buNone/>
+              <a:defRPr sz="700" b="1"/>
             </a:lvl5pPr>
-            <a:lvl6pPr marL="2286000" indent="0">
-              <a:buNone/>
-              <a:defRPr sz="1600" b="1"/>
+            <a:lvl6pPr marL="1044931" indent="0">
+              <a:buNone/>
+              <a:defRPr sz="700" b="1"/>
             </a:lvl6pPr>
-            <a:lvl7pPr marL="2743200" indent="0">
-              <a:buNone/>
-              <a:defRPr sz="1600" b="1"/>
+            <a:lvl7pPr marL="1253917" indent="0">
+              <a:buNone/>
+              <a:defRPr sz="700" b="1"/>
             </a:lvl7pPr>
-            <a:lvl8pPr marL="3200400" indent="0">
-              <a:buNone/>
-              <a:defRPr sz="1600" b="1"/>
+            <a:lvl8pPr marL="1462903" indent="0">
+              <a:buNone/>
+              <a:defRPr sz="700" b="1"/>
             </a:lvl8pPr>
-            <a:lvl9pPr marL="3657600" indent="0">
-              <a:buNone/>
-              <a:defRPr sz="1600" b="1"/>
+            <a:lvl9pPr marL="1671889" indent="0">
+              <a:buNone/>
+              <a:defRPr sz="700" b="1"/>
             </a:lvl9pPr>
           </a:lstStyle>
           <a:p>
@@ -1656,39 +1656,39 @@
         </p:nvSpPr>
         <p:spPr>
           <a:xfrm>
-            <a:off x="4645025" y="2174875"/>
-            <a:ext cx="4041775" cy="3951288"/>
+            <a:off x="1858010" y="1159933"/>
+            <a:ext cx="1616710" cy="2107354"/>
           </a:xfrm>
         </p:spPr>
         <p:txBody>
           <a:bodyPr/>
           <a:lstStyle>
             <a:lvl1pPr>
-              <a:defRPr sz="2400"/>
+              <a:defRPr sz="1100"/>
             </a:lvl1pPr>
             <a:lvl2pPr>
-              <a:defRPr sz="2000"/>
+              <a:defRPr sz="900"/>
             </a:lvl2pPr>
             <a:lvl3pPr>
-              <a:defRPr sz="1800"/>
+              <a:defRPr sz="800"/>
             </a:lvl3pPr>
             <a:lvl4pPr>
-              <a:defRPr sz="1600"/>
+              <a:defRPr sz="700"/>
             </a:lvl4pPr>
             <a:lvl5pPr>
-              <a:defRPr sz="1600"/>
+              <a:defRPr sz="700"/>
             </a:lvl5pPr>
             <a:lvl6pPr>
-              <a:defRPr sz="1600"/>
+              <a:defRPr sz="700"/>
             </a:lvl6pPr>
             <a:lvl7pPr>
-              <a:defRPr sz="1600"/>
+              <a:defRPr sz="700"/>
             </a:lvl7pPr>
             <a:lvl8pPr>
-              <a:defRPr sz="1600"/>
+              <a:defRPr sz="700"/>
             </a:lvl8pPr>
             <a:lvl9pPr>
-              <a:defRPr sz="1600"/>
+              <a:defRPr sz="700"/>
             </a:lvl9pPr>
           </a:lstStyle>
           <a:p>
@@ -1747,7 +1747,7 @@
             <a:fld id="{7AE4F870-186A-EB4F-9838-041FBD4EA0A4}" type="datetimeFigureOut">
               <a:rPr lang="en-US" smtClean="0"/>
               <a:pPr/>
-              <a:t>12/11/18</a:t>
+              <a:t>1/16/19</a:t>
             </a:fld>
             <a:endParaRPr lang="en-US"/>
           </a:p>
@@ -1805,7 +1805,7 @@
 </file>
 
 <file path=ppt/slideLayouts/slideLayout6.xml><?xml version="1.0" encoding="utf-8"?>
-<p:sldLayout xmlns:a="http://schemas.openxmlformats.org/drawingml/2006/main" xmlns:r="http://schemas.openxmlformats.org/officeDocument/2006/relationships" xmlns:mc="http://schemas.openxmlformats.org/markup-compatibility/2006" xmlns:mv="urn:schemas-microsoft-com:mac:vml" xmlns:p="http://schemas.openxmlformats.org/presentationml/2006/main" mc:Ignorable="mv" mc:PreserveAttributes="mv:*" type="titleOnly" preserve="1">
+<p:sldLayout xmlns:a="http://schemas.openxmlformats.org/drawingml/2006/main" xmlns:r="http://schemas.openxmlformats.org/officeDocument/2006/relationships" xmlns:p="http://schemas.openxmlformats.org/presentationml/2006/main" type="titleOnly" preserve="1">
   <p:cSld name="Title Only">
     <p:spTree>
       <p:nvGrpSpPr>
@@ -1862,7 +1862,7 @@
             <a:fld id="{7AE4F870-186A-EB4F-9838-041FBD4EA0A4}" type="datetimeFigureOut">
               <a:rPr lang="en-US" smtClean="0"/>
               <a:pPr/>
-              <a:t>12/11/18</a:t>
+              <a:t>1/16/19</a:t>
             </a:fld>
             <a:endParaRPr lang="en-US"/>
           </a:p>
@@ -1920,7 +1920,7 @@
 </file>
 
 <file path=ppt/slideLayouts/slideLayout7.xml><?xml version="1.0" encoding="utf-8"?>
-<p:sldLayout xmlns:a="http://schemas.openxmlformats.org/drawingml/2006/main" xmlns:r="http://schemas.openxmlformats.org/officeDocument/2006/relationships" xmlns:mc="http://schemas.openxmlformats.org/markup-compatibility/2006" xmlns:mv="urn:schemas-microsoft-com:mac:vml" xmlns:p="http://schemas.openxmlformats.org/presentationml/2006/main" mc:Ignorable="mv" mc:PreserveAttributes="mv:*" type="blank" preserve="1">
+<p:sldLayout xmlns:a="http://schemas.openxmlformats.org/drawingml/2006/main" xmlns:r="http://schemas.openxmlformats.org/officeDocument/2006/relationships" xmlns:p="http://schemas.openxmlformats.org/presentationml/2006/main" type="blank" preserve="1">
   <p:cSld name="Blank">
     <p:spTree>
       <p:nvGrpSpPr>
@@ -1954,7 +1954,7 @@
             <a:fld id="{7AE4F870-186A-EB4F-9838-041FBD4EA0A4}" type="datetimeFigureOut">
               <a:rPr lang="en-US" smtClean="0"/>
               <a:pPr/>
-              <a:t>12/11/18</a:t>
+              <a:t>1/16/19</a:t>
             </a:fld>
             <a:endParaRPr lang="en-US"/>
           </a:p>
@@ -2012,7 +2012,7 @@
 </file>
 
 <file path=ppt/slideLayouts/slideLayout8.xml><?xml version="1.0" encoding="utf-8"?>
-<p:sldLayout xmlns:a="http://schemas.openxmlformats.org/drawingml/2006/main" xmlns:r="http://schemas.openxmlformats.org/officeDocument/2006/relationships" xmlns:mc="http://schemas.openxmlformats.org/markup-compatibility/2006" xmlns:mv="urn:schemas-microsoft-com:mac:vml" xmlns:p="http://schemas.openxmlformats.org/presentationml/2006/main" mc:Ignorable="mv" mc:PreserveAttributes="mv:*" type="objTx" preserve="1">
+<p:sldLayout xmlns:a="http://schemas.openxmlformats.org/drawingml/2006/main" xmlns:r="http://schemas.openxmlformats.org/officeDocument/2006/relationships" xmlns:p="http://schemas.openxmlformats.org/presentationml/2006/main" type="objTx" preserve="1">
   <p:cSld name="Content with Caption">
     <p:spTree>
       <p:nvGrpSpPr>
@@ -2040,15 +2040,15 @@
         </p:nvSpPr>
         <p:spPr>
           <a:xfrm>
-            <a:off x="457200" y="273050"/>
-            <a:ext cx="3008313" cy="1162050"/>
+            <a:off x="182880" y="145627"/>
+            <a:ext cx="1203325" cy="619760"/>
           </a:xfrm>
         </p:spPr>
         <p:txBody>
           <a:bodyPr anchor="b"/>
           <a:lstStyle>
             <a:lvl1pPr algn="l">
-              <a:defRPr sz="2000" b="1"/>
+              <a:defRPr sz="900" b="1"/>
             </a:lvl1pPr>
           </a:lstStyle>
           <a:p>
@@ -2072,132 +2072,38 @@
         </p:nvSpPr>
         <p:spPr>
           <a:xfrm>
-            <a:off x="3575050" y="273050"/>
-            <a:ext cx="5111750" cy="5853113"/>
+            <a:off x="1430020" y="145627"/>
+            <a:ext cx="2044700" cy="3121660"/>
           </a:xfrm>
         </p:spPr>
         <p:txBody>
           <a:bodyPr/>
           <a:lstStyle>
             <a:lvl1pPr>
-              <a:defRPr sz="3200"/>
+              <a:defRPr sz="1500"/>
             </a:lvl1pPr>
             <a:lvl2pPr>
-              <a:defRPr sz="2800"/>
+              <a:defRPr sz="1300"/>
             </a:lvl2pPr>
             <a:lvl3pPr>
-              <a:defRPr sz="2400"/>
+              <a:defRPr sz="1100"/>
             </a:lvl3pPr>
             <a:lvl4pPr>
-              <a:defRPr sz="2000"/>
+              <a:defRPr sz="900"/>
             </a:lvl4pPr>
             <a:lvl5pPr>
-              <a:defRPr sz="2000"/>
+              <a:defRPr sz="900"/>
             </a:lvl5pPr>
             <a:lvl6pPr>
-              <a:defRPr sz="2000"/>
+              <a:defRPr sz="900"/>
             </a:lvl6pPr>
             <a:lvl7pPr>
-              <a:defRPr sz="2000"/>
+              <a:defRPr sz="900"/>
             </a:lvl7pPr>
             <a:lvl8pPr>
-              <a:defRPr sz="2000"/>
+              <a:defRPr sz="900"/>
             </a:lvl8pPr>
             <a:lvl9pPr>
-              <a:defRPr sz="2000"/>
-            </a:lvl9pPr>
-          </a:lstStyle>
-          <a:p>
-            <a:pPr lvl="0"/>
-            <a:r>
-              <a:rPr lang="en-US" smtClean="0"/>
-              <a:t>Click to edit Master text styles</a:t>
-            </a:r>
-          </a:p>
-          <a:p>
-            <a:pPr lvl="1"/>
-            <a:r>
-              <a:rPr lang="en-US" smtClean="0"/>
-              <a:t>Second level</a:t>
-            </a:r>
-          </a:p>
-          <a:p>
-            <a:pPr lvl="2"/>
-            <a:r>
-              <a:rPr lang="en-US" smtClean="0"/>
-              <a:t>Third level</a:t>
-            </a:r>
-          </a:p>
-          <a:p>
-            <a:pPr lvl="3"/>
-            <a:r>
-              <a:rPr lang="en-US" smtClean="0"/>
-              <a:t>Fourth level</a:t>
-            </a:r>
-          </a:p>
-          <a:p>
-            <a:pPr lvl="4"/>
-            <a:r>
-              <a:rPr lang="en-US" smtClean="0"/>
-              <a:t>Fifth level</a:t>
-            </a:r>
-            <a:endParaRPr lang="en-US"/>
-          </a:p>
-        </p:txBody>
-      </p:sp>
-      <p:sp>
-        <p:nvSpPr>
-          <p:cNvPr id="4" name="Text Placeholder 3"/>
-          <p:cNvSpPr>
-            <a:spLocks noGrp="1"/>
-          </p:cNvSpPr>
-          <p:nvPr>
-            <p:ph type="body" sz="half" idx="2"/>
-          </p:nvPr>
-        </p:nvSpPr>
-        <p:spPr>
-          <a:xfrm>
-            <a:off x="457200" y="1435100"/>
-            <a:ext cx="3008313" cy="4691063"/>
-          </a:xfrm>
-        </p:spPr>
-        <p:txBody>
-          <a:bodyPr/>
-          <a:lstStyle>
-            <a:lvl1pPr marL="0" indent="0">
-              <a:buNone/>
-              <a:defRPr sz="1400"/>
-            </a:lvl1pPr>
-            <a:lvl2pPr marL="457200" indent="0">
-              <a:buNone/>
-              <a:defRPr sz="1200"/>
-            </a:lvl2pPr>
-            <a:lvl3pPr marL="914400" indent="0">
-              <a:buNone/>
-              <a:defRPr sz="1000"/>
-            </a:lvl3pPr>
-            <a:lvl4pPr marL="1371600" indent="0">
-              <a:buNone/>
-              <a:defRPr sz="900"/>
-            </a:lvl4pPr>
-            <a:lvl5pPr marL="1828800" indent="0">
-              <a:buNone/>
-              <a:defRPr sz="900"/>
-            </a:lvl5pPr>
-            <a:lvl6pPr marL="2286000" indent="0">
-              <a:buNone/>
-              <a:defRPr sz="900"/>
-            </a:lvl6pPr>
-            <a:lvl7pPr marL="2743200" indent="0">
-              <a:buNone/>
-              <a:defRPr sz="900"/>
-            </a:lvl7pPr>
-            <a:lvl8pPr marL="3200400" indent="0">
-              <a:buNone/>
-              <a:defRPr sz="900"/>
-            </a:lvl8pPr>
-            <a:lvl9pPr marL="3657600" indent="0">
-              <a:buNone/>
               <a:defRPr sz="900"/>
             </a:lvl9pPr>
           </a:lstStyle>
@@ -2208,6 +2114,100 @@
               <a:t>Click to edit Master text styles</a:t>
             </a:r>
           </a:p>
+          <a:p>
+            <a:pPr lvl="1"/>
+            <a:r>
+              <a:rPr lang="en-US" smtClean="0"/>
+              <a:t>Second level</a:t>
+            </a:r>
+          </a:p>
+          <a:p>
+            <a:pPr lvl="2"/>
+            <a:r>
+              <a:rPr lang="en-US" smtClean="0"/>
+              <a:t>Third level</a:t>
+            </a:r>
+          </a:p>
+          <a:p>
+            <a:pPr lvl="3"/>
+            <a:r>
+              <a:rPr lang="en-US" smtClean="0"/>
+              <a:t>Fourth level</a:t>
+            </a:r>
+          </a:p>
+          <a:p>
+            <a:pPr lvl="4"/>
+            <a:r>
+              <a:rPr lang="en-US" smtClean="0"/>
+              <a:t>Fifth level</a:t>
+            </a:r>
+            <a:endParaRPr lang="en-US"/>
+          </a:p>
+        </p:txBody>
+      </p:sp>
+      <p:sp>
+        <p:nvSpPr>
+          <p:cNvPr id="4" name="Text Placeholder 3"/>
+          <p:cNvSpPr>
+            <a:spLocks noGrp="1"/>
+          </p:cNvSpPr>
+          <p:nvPr>
+            <p:ph type="body" sz="half" idx="2"/>
+          </p:nvPr>
+        </p:nvSpPr>
+        <p:spPr>
+          <a:xfrm>
+            <a:off x="182880" y="765387"/>
+            <a:ext cx="1203325" cy="2501900"/>
+          </a:xfrm>
+        </p:spPr>
+        <p:txBody>
+          <a:bodyPr/>
+          <a:lstStyle>
+            <a:lvl1pPr marL="0" indent="0">
+              <a:buNone/>
+              <a:defRPr sz="600"/>
+            </a:lvl1pPr>
+            <a:lvl2pPr marL="208986" indent="0">
+              <a:buNone/>
+              <a:defRPr sz="500"/>
+            </a:lvl2pPr>
+            <a:lvl3pPr marL="417972" indent="0">
+              <a:buNone/>
+              <a:defRPr sz="500"/>
+            </a:lvl3pPr>
+            <a:lvl4pPr marL="626958" indent="0">
+              <a:buNone/>
+              <a:defRPr sz="400"/>
+            </a:lvl4pPr>
+            <a:lvl5pPr marL="835944" indent="0">
+              <a:buNone/>
+              <a:defRPr sz="400"/>
+            </a:lvl5pPr>
+            <a:lvl6pPr marL="1044931" indent="0">
+              <a:buNone/>
+              <a:defRPr sz="400"/>
+            </a:lvl6pPr>
+            <a:lvl7pPr marL="1253917" indent="0">
+              <a:buNone/>
+              <a:defRPr sz="400"/>
+            </a:lvl7pPr>
+            <a:lvl8pPr marL="1462903" indent="0">
+              <a:buNone/>
+              <a:defRPr sz="400"/>
+            </a:lvl8pPr>
+            <a:lvl9pPr marL="1671889" indent="0">
+              <a:buNone/>
+              <a:defRPr sz="400"/>
+            </a:lvl9pPr>
+          </a:lstStyle>
+          <a:p>
+            <a:pPr lvl="0"/>
+            <a:r>
+              <a:rPr lang="en-US" smtClean="0"/>
+              <a:t>Click to edit Master text styles</a:t>
+            </a:r>
+          </a:p>
         </p:txBody>
       </p:sp>
       <p:sp>
@@ -2228,7 +2228,7 @@
             <a:fld id="{7AE4F870-186A-EB4F-9838-041FBD4EA0A4}" type="datetimeFigureOut">
               <a:rPr lang="en-US" smtClean="0"/>
               <a:pPr/>
-              <a:t>12/11/18</a:t>
+              <a:t>1/16/19</a:t>
             </a:fld>
             <a:endParaRPr lang="en-US"/>
           </a:p>
@@ -2286,7 +2286,7 @@
 </file>
 
 <file path=ppt/slideLayouts/slideLayout9.xml><?xml version="1.0" encoding="utf-8"?>
-<p:sldLayout xmlns:a="http://schemas.openxmlformats.org/drawingml/2006/main" xmlns:r="http://schemas.openxmlformats.org/officeDocument/2006/relationships" xmlns:mc="http://schemas.openxmlformats.org/markup-compatibility/2006" xmlns:mv="urn:schemas-microsoft-com:mac:vml" xmlns:p="http://schemas.openxmlformats.org/presentationml/2006/main" mc:Ignorable="mv" mc:PreserveAttributes="mv:*" type="picTx" preserve="1">
+<p:sldLayout xmlns:a="http://schemas.openxmlformats.org/drawingml/2006/main" xmlns:r="http://schemas.openxmlformats.org/officeDocument/2006/relationships" xmlns:p="http://schemas.openxmlformats.org/presentationml/2006/main" type="picTx" preserve="1">
   <p:cSld name="Picture with Caption">
     <p:spTree>
       <p:nvGrpSpPr>
@@ -2314,15 +2314,15 @@
         </p:nvSpPr>
         <p:spPr>
           <a:xfrm>
-            <a:off x="1792288" y="4800600"/>
-            <a:ext cx="5486400" cy="566738"/>
+            <a:off x="716915" y="2560320"/>
+            <a:ext cx="2194560" cy="302260"/>
           </a:xfrm>
         </p:spPr>
         <p:txBody>
           <a:bodyPr anchor="b"/>
           <a:lstStyle>
             <a:lvl1pPr algn="l">
-              <a:defRPr sz="2000" b="1"/>
+              <a:defRPr sz="900" b="1"/>
             </a:lvl1pPr>
           </a:lstStyle>
           <a:p>
@@ -2346,8 +2346,8 @@
         </p:nvSpPr>
         <p:spPr>
           <a:xfrm>
-            <a:off x="1792288" y="612775"/>
-            <a:ext cx="5486400" cy="4114800"/>
+            <a:off x="716915" y="326813"/>
+            <a:ext cx="2194560" cy="2194560"/>
           </a:xfrm>
         </p:spPr>
         <p:txBody>
@@ -2355,103 +2355,103 @@
           <a:lstStyle>
             <a:lvl1pPr marL="0" indent="0">
               <a:buNone/>
-              <a:defRPr sz="3200"/>
+              <a:defRPr sz="1500"/>
             </a:lvl1pPr>
-            <a:lvl2pPr marL="457200" indent="0">
-              <a:buNone/>
-              <a:defRPr sz="2800"/>
+            <a:lvl2pPr marL="208986" indent="0">
+              <a:buNone/>
+              <a:defRPr sz="1300"/>
             </a:lvl2pPr>
-            <a:lvl3pPr marL="914400" indent="0">
-              <a:buNone/>
-              <a:defRPr sz="2400"/>
+            <a:lvl3pPr marL="417972" indent="0">
+              <a:buNone/>
+              <a:defRPr sz="1100"/>
             </a:lvl3pPr>
-            <a:lvl4pPr marL="1371600" indent="0">
-              <a:buNone/>
-              <a:defRPr sz="2000"/>
-            </a:lvl4pPr>
-            <a:lvl5pPr marL="1828800" indent="0">
-              <a:buNone/>
-              <a:defRPr sz="2000"/>
-            </a:lvl5pPr>
-            <a:lvl6pPr marL="2286000" indent="0">
-              <a:buNone/>
-              <a:defRPr sz="2000"/>
-            </a:lvl6pPr>
-            <a:lvl7pPr marL="2743200" indent="0">
-              <a:buNone/>
-              <a:defRPr sz="2000"/>
-            </a:lvl7pPr>
-            <a:lvl8pPr marL="3200400" indent="0">
-              <a:buNone/>
-              <a:defRPr sz="2000"/>
-            </a:lvl8pPr>
-            <a:lvl9pPr marL="3657600" indent="0">
-              <a:buNone/>
-              <a:defRPr sz="2000"/>
-            </a:lvl9pPr>
-          </a:lstStyle>
-          <a:p>
-            <a:endParaRPr lang="en-US"/>
-          </a:p>
-        </p:txBody>
-      </p:sp>
-      <p:sp>
-        <p:nvSpPr>
-          <p:cNvPr id="4" name="Text Placeholder 3"/>
-          <p:cNvSpPr>
-            <a:spLocks noGrp="1"/>
-          </p:cNvSpPr>
-          <p:nvPr>
-            <p:ph type="body" sz="half" idx="2"/>
-          </p:nvPr>
-        </p:nvSpPr>
-        <p:spPr>
-          <a:xfrm>
-            <a:off x="1792288" y="5367338"/>
-            <a:ext cx="5486400" cy="804862"/>
-          </a:xfrm>
-        </p:spPr>
-        <p:txBody>
-          <a:bodyPr/>
-          <a:lstStyle>
-            <a:lvl1pPr marL="0" indent="0">
-              <a:buNone/>
-              <a:defRPr sz="1400"/>
-            </a:lvl1pPr>
-            <a:lvl2pPr marL="457200" indent="0">
-              <a:buNone/>
-              <a:defRPr sz="1200"/>
-            </a:lvl2pPr>
-            <a:lvl3pPr marL="914400" indent="0">
-              <a:buNone/>
-              <a:defRPr sz="1000"/>
-            </a:lvl3pPr>
-            <a:lvl4pPr marL="1371600" indent="0">
+            <a:lvl4pPr marL="626958" indent="0">
               <a:buNone/>
               <a:defRPr sz="900"/>
             </a:lvl4pPr>
-            <a:lvl5pPr marL="1828800" indent="0">
+            <a:lvl5pPr marL="835944" indent="0">
               <a:buNone/>
               <a:defRPr sz="900"/>
             </a:lvl5pPr>
-            <a:lvl6pPr marL="2286000" indent="0">
+            <a:lvl6pPr marL="1044931" indent="0">
               <a:buNone/>
               <a:defRPr sz="900"/>
             </a:lvl6pPr>
-            <a:lvl7pPr marL="2743200" indent="0">
+            <a:lvl7pPr marL="1253917" indent="0">
               <a:buNone/>
               <a:defRPr sz="900"/>
             </a:lvl7pPr>
-            <a:lvl8pPr marL="3200400" indent="0">
+            <a:lvl8pPr marL="1462903" indent="0">
               <a:buNone/>
               <a:defRPr sz="900"/>
             </a:lvl8pPr>
-            <a:lvl9pPr marL="3657600" indent="0">
+            <a:lvl9pPr marL="1671889" indent="0">
               <a:buNone/>
               <a:defRPr sz="900"/>
             </a:lvl9pPr>
           </a:lstStyle>
           <a:p>
+            <a:endParaRPr lang="en-US"/>
+          </a:p>
+        </p:txBody>
+      </p:sp>
+      <p:sp>
+        <p:nvSpPr>
+          <p:cNvPr id="4" name="Text Placeholder 3"/>
+          <p:cNvSpPr>
+            <a:spLocks noGrp="1"/>
+          </p:cNvSpPr>
+          <p:nvPr>
+            <p:ph type="body" sz="half" idx="2"/>
+          </p:nvPr>
+        </p:nvSpPr>
+        <p:spPr>
+          <a:xfrm>
+            <a:off x="716915" y="2862580"/>
+            <a:ext cx="2194560" cy="429260"/>
+          </a:xfrm>
+        </p:spPr>
+        <p:txBody>
+          <a:bodyPr/>
+          <a:lstStyle>
+            <a:lvl1pPr marL="0" indent="0">
+              <a:buNone/>
+              <a:defRPr sz="600"/>
+            </a:lvl1pPr>
+            <a:lvl2pPr marL="208986" indent="0">
+              <a:buNone/>
+              <a:defRPr sz="500"/>
+            </a:lvl2pPr>
+            <a:lvl3pPr marL="417972" indent="0">
+              <a:buNone/>
+              <a:defRPr sz="500"/>
+            </a:lvl3pPr>
+            <a:lvl4pPr marL="626958" indent="0">
+              <a:buNone/>
+              <a:defRPr sz="400"/>
+            </a:lvl4pPr>
+            <a:lvl5pPr marL="835944" indent="0">
+              <a:buNone/>
+              <a:defRPr sz="400"/>
+            </a:lvl5pPr>
+            <a:lvl6pPr marL="1044931" indent="0">
+              <a:buNone/>
+              <a:defRPr sz="400"/>
+            </a:lvl6pPr>
+            <a:lvl7pPr marL="1253917" indent="0">
+              <a:buNone/>
+              <a:defRPr sz="400"/>
+            </a:lvl7pPr>
+            <a:lvl8pPr marL="1462903" indent="0">
+              <a:buNone/>
+              <a:defRPr sz="400"/>
+            </a:lvl8pPr>
+            <a:lvl9pPr marL="1671889" indent="0">
+              <a:buNone/>
+              <a:defRPr sz="400"/>
+            </a:lvl9pPr>
+          </a:lstStyle>
+          <a:p>
             <a:pPr lvl="0"/>
             <a:r>
               <a:rPr lang="en-US" smtClean="0"/>
@@ -2478,7 +2478,7 @@
             <a:fld id="{7AE4F870-186A-EB4F-9838-041FBD4EA0A4}" type="datetimeFigureOut">
               <a:rPr lang="en-US" smtClean="0"/>
               <a:pPr/>
-              <a:t>12/11/18</a:t>
+              <a:t>1/16/19</a:t>
             </a:fld>
             <a:endParaRPr lang="en-US"/>
           </a:p>
@@ -2536,7 +2536,7 @@
 </file>
 
 <file path=ppt/slideMasters/slideMaster1.xml><?xml version="1.0" encoding="utf-8"?>
-<p:sldMaster xmlns:a="http://schemas.openxmlformats.org/drawingml/2006/main" xmlns:r="http://schemas.openxmlformats.org/officeDocument/2006/relationships" xmlns:mc="http://schemas.openxmlformats.org/markup-compatibility/2006" xmlns:mv="urn:schemas-microsoft-com:mac:vml" xmlns:p="http://schemas.openxmlformats.org/presentationml/2006/main" mc:Ignorable="mv" mc:PreserveAttributes="mv:*">
+<p:sldMaster xmlns:a="http://schemas.openxmlformats.org/drawingml/2006/main" xmlns:r="http://schemas.openxmlformats.org/officeDocument/2006/relationships" xmlns:p="http://schemas.openxmlformats.org/presentationml/2006/main">
   <p:cSld>
     <p:bg>
       <p:bgRef idx="1001">
@@ -2569,15 +2569,15 @@
         </p:nvSpPr>
         <p:spPr>
           <a:xfrm>
-            <a:off x="457200" y="274638"/>
-            <a:ext cx="8229600" cy="1143000"/>
+            <a:off x="182880" y="146474"/>
+            <a:ext cx="3291840" cy="609600"/>
           </a:xfrm>
           <a:prstGeom prst="rect">
             <a:avLst/>
           </a:prstGeom>
         </p:spPr>
         <p:txBody>
-          <a:bodyPr vert="horz" lIns="91440" tIns="45720" rIns="91440" bIns="45720" rtlCol="0" anchor="ctr">
+          <a:bodyPr vert="horz" lIns="41797" tIns="20899" rIns="41797" bIns="20899" rtlCol="0" anchor="ctr">
             <a:normAutofit/>
           </a:bodyPr>
           <a:lstStyle/>
@@ -2602,15 +2602,15 @@
         </p:nvSpPr>
         <p:spPr>
           <a:xfrm>
-            <a:off x="457200" y="1600200"/>
-            <a:ext cx="8229600" cy="4525963"/>
+            <a:off x="182880" y="853440"/>
+            <a:ext cx="3291840" cy="2413847"/>
           </a:xfrm>
           <a:prstGeom prst="rect">
             <a:avLst/>
           </a:prstGeom>
         </p:spPr>
         <p:txBody>
-          <a:bodyPr vert="horz" lIns="91440" tIns="45720" rIns="91440" bIns="45720" rtlCol="0">
+          <a:bodyPr vert="horz" lIns="41797" tIns="20899" rIns="41797" bIns="20899" rtlCol="0">
             <a:normAutofit/>
           </a:bodyPr>
           <a:lstStyle/>
@@ -2664,18 +2664,18 @@
         </p:nvSpPr>
         <p:spPr>
           <a:xfrm>
-            <a:off x="457200" y="6356350"/>
-            <a:ext cx="2133600" cy="365125"/>
+            <a:off x="182880" y="3390054"/>
+            <a:ext cx="853440" cy="194733"/>
           </a:xfrm>
           <a:prstGeom prst="rect">
             <a:avLst/>
           </a:prstGeom>
         </p:spPr>
         <p:txBody>
-          <a:bodyPr vert="horz" lIns="91440" tIns="45720" rIns="91440" bIns="45720" rtlCol="0" anchor="ctr"/>
+          <a:bodyPr vert="horz" lIns="41797" tIns="20899" rIns="41797" bIns="20899" rtlCol="0" anchor="ctr"/>
           <a:lstStyle>
             <a:lvl1pPr algn="l">
-              <a:defRPr sz="1200">
+              <a:defRPr sz="500">
                 <a:solidFill>
                   <a:schemeClr val="tx1">
                     <a:tint val="75000"/>
@@ -2688,7 +2688,7 @@
             <a:fld id="{7AE4F870-186A-EB4F-9838-041FBD4EA0A4}" type="datetimeFigureOut">
               <a:rPr lang="en-US" smtClean="0"/>
               <a:pPr/>
-              <a:t>12/11/18</a:t>
+              <a:t>1/16/19</a:t>
             </a:fld>
             <a:endParaRPr lang="en-US"/>
           </a:p>
@@ -2706,18 +2706,18 @@
         </p:nvSpPr>
         <p:spPr>
           <a:xfrm>
-            <a:off x="3124200" y="6356350"/>
-            <a:ext cx="2895600" cy="365125"/>
+            <a:off x="1249680" y="3390054"/>
+            <a:ext cx="1158240" cy="194733"/>
           </a:xfrm>
           <a:prstGeom prst="rect">
             <a:avLst/>
           </a:prstGeom>
         </p:spPr>
         <p:txBody>
-          <a:bodyPr vert="horz" lIns="91440" tIns="45720" rIns="91440" bIns="45720" rtlCol="0" anchor="ctr"/>
+          <a:bodyPr vert="horz" lIns="41797" tIns="20899" rIns="41797" bIns="20899" rtlCol="0" anchor="ctr"/>
           <a:lstStyle>
             <a:lvl1pPr algn="ctr">
-              <a:defRPr sz="1200">
+              <a:defRPr sz="500">
                 <a:solidFill>
                   <a:schemeClr val="tx1">
                     <a:tint val="75000"/>
@@ -2743,18 +2743,18 @@
         </p:nvSpPr>
         <p:spPr>
           <a:xfrm>
-            <a:off x="6553200" y="6356350"/>
-            <a:ext cx="2133600" cy="365125"/>
+            <a:off x="2621280" y="3390054"/>
+            <a:ext cx="853440" cy="194733"/>
           </a:xfrm>
           <a:prstGeom prst="rect">
             <a:avLst/>
           </a:prstGeom>
         </p:spPr>
         <p:txBody>
-          <a:bodyPr vert="horz" lIns="91440" tIns="45720" rIns="91440" bIns="45720" rtlCol="0" anchor="ctr"/>
+          <a:bodyPr vert="horz" lIns="41797" tIns="20899" rIns="41797" bIns="20899" rtlCol="0" anchor="ctr"/>
           <a:lstStyle>
             <a:lvl1pPr algn="r">
-              <a:defRPr sz="1200">
+              <a:defRPr sz="500">
                 <a:solidFill>
                   <a:schemeClr val="tx1">
                     <a:tint val="75000"/>
@@ -2791,12 +2791,12 @@
   </p:sldLayoutIdLst>
   <p:txStyles>
     <p:titleStyle>
-      <a:lvl1pPr algn="ctr" defTabSz="457200" rtl="0" eaLnBrk="1" latinLnBrk="0" hangingPunct="1">
+      <a:lvl1pPr algn="ctr" defTabSz="208986" rtl="0" eaLnBrk="1" latinLnBrk="0" hangingPunct="1">
         <a:spcBef>
           <a:spcPct val="0"/>
         </a:spcBef>
         <a:buNone/>
-        <a:defRPr sz="4400" kern="1200">
+        <a:defRPr sz="2000" kern="1200">
           <a:solidFill>
             <a:schemeClr val="tx1"/>
           </a:solidFill>
@@ -2807,13 +2807,13 @@
       </a:lvl1pPr>
     </p:titleStyle>
     <p:bodyStyle>
-      <a:lvl1pPr marL="342900" indent="-342900" algn="l" defTabSz="457200" rtl="0" eaLnBrk="1" latinLnBrk="0" hangingPunct="1">
+      <a:lvl1pPr marL="156740" indent="-156740" algn="l" defTabSz="208986" rtl="0" eaLnBrk="1" latinLnBrk="0" hangingPunct="1">
         <a:spcBef>
           <a:spcPct val="20000"/>
         </a:spcBef>
         <a:buFont typeface="Arial"/>
         <a:buChar char="•"/>
-        <a:defRPr sz="3200" kern="1200">
+        <a:defRPr sz="1500" kern="1200">
           <a:solidFill>
             <a:schemeClr val="tx1"/>
           </a:solidFill>
@@ -2822,13 +2822,13 @@
           <a:cs typeface="+mn-cs"/>
         </a:defRPr>
       </a:lvl1pPr>
-      <a:lvl2pPr marL="742950" indent="-285750" algn="l" defTabSz="457200" rtl="0" eaLnBrk="1" latinLnBrk="0" hangingPunct="1">
+      <a:lvl2pPr marL="339602" indent="-130616" algn="l" defTabSz="208986" rtl="0" eaLnBrk="1" latinLnBrk="0" hangingPunct="1">
         <a:spcBef>
           <a:spcPct val="20000"/>
         </a:spcBef>
         <a:buFont typeface="Arial"/>
         <a:buChar char="–"/>
-        <a:defRPr sz="2800" kern="1200">
+        <a:defRPr sz="1300" kern="1200">
           <a:solidFill>
             <a:schemeClr val="tx1"/>
           </a:solidFill>
@@ -2837,13 +2837,13 @@
           <a:cs typeface="+mn-cs"/>
         </a:defRPr>
       </a:lvl2pPr>
-      <a:lvl3pPr marL="1143000" indent="-228600" algn="l" defTabSz="457200" rtl="0" eaLnBrk="1" latinLnBrk="0" hangingPunct="1">
+      <a:lvl3pPr marL="522465" indent="-104493" algn="l" defTabSz="208986" rtl="0" eaLnBrk="1" latinLnBrk="0" hangingPunct="1">
         <a:spcBef>
           <a:spcPct val="20000"/>
         </a:spcBef>
         <a:buFont typeface="Arial"/>
         <a:buChar char="•"/>
-        <a:defRPr sz="2400" kern="1200">
+        <a:defRPr sz="1100" kern="1200">
           <a:solidFill>
             <a:schemeClr val="tx1"/>
           </a:solidFill>
@@ -2852,13 +2852,13 @@
           <a:cs typeface="+mn-cs"/>
         </a:defRPr>
       </a:lvl3pPr>
-      <a:lvl4pPr marL="1600200" indent="-228600" algn="l" defTabSz="457200" rtl="0" eaLnBrk="1" latinLnBrk="0" hangingPunct="1">
+      <a:lvl4pPr marL="731451" indent="-104493" algn="l" defTabSz="208986" rtl="0" eaLnBrk="1" latinLnBrk="0" hangingPunct="1">
         <a:spcBef>
           <a:spcPct val="20000"/>
         </a:spcBef>
         <a:buFont typeface="Arial"/>
         <a:buChar char="–"/>
-        <a:defRPr sz="2000" kern="1200">
+        <a:defRPr sz="900" kern="1200">
           <a:solidFill>
             <a:schemeClr val="tx1"/>
           </a:solidFill>
@@ -2867,13 +2867,13 @@
           <a:cs typeface="+mn-cs"/>
         </a:defRPr>
       </a:lvl4pPr>
-      <a:lvl5pPr marL="2057400" indent="-228600" algn="l" defTabSz="457200" rtl="0" eaLnBrk="1" latinLnBrk="0" hangingPunct="1">
+      <a:lvl5pPr marL="940438" indent="-104493" algn="l" defTabSz="208986" rtl="0" eaLnBrk="1" latinLnBrk="0" hangingPunct="1">
         <a:spcBef>
           <a:spcPct val="20000"/>
         </a:spcBef>
         <a:buFont typeface="Arial"/>
         <a:buChar char="»"/>
-        <a:defRPr sz="2000" kern="1200">
+        <a:defRPr sz="900" kern="1200">
           <a:solidFill>
             <a:schemeClr val="tx1"/>
           </a:solidFill>
@@ -2882,13 +2882,13 @@
           <a:cs typeface="+mn-cs"/>
         </a:defRPr>
       </a:lvl5pPr>
-      <a:lvl6pPr marL="2514600" indent="-228600" algn="l" defTabSz="457200" rtl="0" eaLnBrk="1" latinLnBrk="0" hangingPunct="1">
+      <a:lvl6pPr marL="1149424" indent="-104493" algn="l" defTabSz="208986" rtl="0" eaLnBrk="1" latinLnBrk="0" hangingPunct="1">
         <a:spcBef>
           <a:spcPct val="20000"/>
         </a:spcBef>
         <a:buFont typeface="Arial"/>
         <a:buChar char="•"/>
-        <a:defRPr sz="2000" kern="1200">
+        <a:defRPr sz="900" kern="1200">
           <a:solidFill>
             <a:schemeClr val="tx1"/>
           </a:solidFill>
@@ -2897,13 +2897,13 @@
           <a:cs typeface="+mn-cs"/>
         </a:defRPr>
       </a:lvl6pPr>
-      <a:lvl7pPr marL="2971800" indent="-228600" algn="l" defTabSz="457200" rtl="0" eaLnBrk="1" latinLnBrk="0" hangingPunct="1">
+      <a:lvl7pPr marL="1358410" indent="-104493" algn="l" defTabSz="208986" rtl="0" eaLnBrk="1" latinLnBrk="0" hangingPunct="1">
         <a:spcBef>
           <a:spcPct val="20000"/>
         </a:spcBef>
         <a:buFont typeface="Arial"/>
         <a:buChar char="•"/>
-        <a:defRPr sz="2000" kern="1200">
+        <a:defRPr sz="900" kern="1200">
           <a:solidFill>
             <a:schemeClr val="tx1"/>
           </a:solidFill>
@@ -2912,13 +2912,13 @@
           <a:cs typeface="+mn-cs"/>
         </a:defRPr>
       </a:lvl7pPr>
-      <a:lvl8pPr marL="3429000" indent="-228600" algn="l" defTabSz="457200" rtl="0" eaLnBrk="1" latinLnBrk="0" hangingPunct="1">
+      <a:lvl8pPr marL="1567396" indent="-104493" algn="l" defTabSz="208986" rtl="0" eaLnBrk="1" latinLnBrk="0" hangingPunct="1">
         <a:spcBef>
           <a:spcPct val="20000"/>
         </a:spcBef>
         <a:buFont typeface="Arial"/>
         <a:buChar char="•"/>
-        <a:defRPr sz="2000" kern="1200">
+        <a:defRPr sz="900" kern="1200">
           <a:solidFill>
             <a:schemeClr val="tx1"/>
           </a:solidFill>
@@ -2927,13 +2927,13 @@
           <a:cs typeface="+mn-cs"/>
         </a:defRPr>
       </a:lvl8pPr>
-      <a:lvl9pPr marL="3886200" indent="-228600" algn="l" defTabSz="457200" rtl="0" eaLnBrk="1" latinLnBrk="0" hangingPunct="1">
+      <a:lvl9pPr marL="1776382" indent="-104493" algn="l" defTabSz="208986" rtl="0" eaLnBrk="1" latinLnBrk="0" hangingPunct="1">
         <a:spcBef>
           <a:spcPct val="20000"/>
         </a:spcBef>
         <a:buFont typeface="Arial"/>
         <a:buChar char="•"/>
-        <a:defRPr sz="2000" kern="1200">
+        <a:defRPr sz="900" kern="1200">
           <a:solidFill>
             <a:schemeClr val="tx1"/>
           </a:solidFill>
@@ -2947,8 +2947,8 @@
       <a:defPPr>
         <a:defRPr lang="en-US"/>
       </a:defPPr>
-      <a:lvl1pPr marL="0" algn="l" defTabSz="457200" rtl="0" eaLnBrk="1" latinLnBrk="0" hangingPunct="1">
-        <a:defRPr sz="1800" kern="1200">
+      <a:lvl1pPr marL="0" algn="l" defTabSz="208986" rtl="0" eaLnBrk="1" latinLnBrk="0" hangingPunct="1">
+        <a:defRPr sz="800" kern="1200">
           <a:solidFill>
             <a:schemeClr val="tx1"/>
           </a:solidFill>
@@ -2957,8 +2957,8 @@
           <a:cs typeface="+mn-cs"/>
         </a:defRPr>
       </a:lvl1pPr>
-      <a:lvl2pPr marL="457200" algn="l" defTabSz="457200" rtl="0" eaLnBrk="1" latinLnBrk="0" hangingPunct="1">
-        <a:defRPr sz="1800" kern="1200">
+      <a:lvl2pPr marL="208986" algn="l" defTabSz="208986" rtl="0" eaLnBrk="1" latinLnBrk="0" hangingPunct="1">
+        <a:defRPr sz="800" kern="1200">
           <a:solidFill>
             <a:schemeClr val="tx1"/>
           </a:solidFill>
@@ -2967,8 +2967,8 @@
           <a:cs typeface="+mn-cs"/>
         </a:defRPr>
       </a:lvl2pPr>
-      <a:lvl3pPr marL="914400" algn="l" defTabSz="457200" rtl="0" eaLnBrk="1" latinLnBrk="0" hangingPunct="1">
-        <a:defRPr sz="1800" kern="1200">
+      <a:lvl3pPr marL="417972" algn="l" defTabSz="208986" rtl="0" eaLnBrk="1" latinLnBrk="0" hangingPunct="1">
+        <a:defRPr sz="800" kern="1200">
           <a:solidFill>
             <a:schemeClr val="tx1"/>
           </a:solidFill>
@@ -2977,8 +2977,8 @@
           <a:cs typeface="+mn-cs"/>
         </a:defRPr>
       </a:lvl3pPr>
-      <a:lvl4pPr marL="1371600" algn="l" defTabSz="457200" rtl="0" eaLnBrk="1" latinLnBrk="0" hangingPunct="1">
-        <a:defRPr sz="1800" kern="1200">
+      <a:lvl4pPr marL="626958" algn="l" defTabSz="208986" rtl="0" eaLnBrk="1" latinLnBrk="0" hangingPunct="1">
+        <a:defRPr sz="800" kern="1200">
           <a:solidFill>
             <a:schemeClr val="tx1"/>
           </a:solidFill>
@@ -2987,8 +2987,8 @@
           <a:cs typeface="+mn-cs"/>
         </a:defRPr>
       </a:lvl4pPr>
-      <a:lvl5pPr marL="1828800" algn="l" defTabSz="457200" rtl="0" eaLnBrk="1" latinLnBrk="0" hangingPunct="1">
-        <a:defRPr sz="1800" kern="1200">
+      <a:lvl5pPr marL="835944" algn="l" defTabSz="208986" rtl="0" eaLnBrk="1" latinLnBrk="0" hangingPunct="1">
+        <a:defRPr sz="800" kern="1200">
           <a:solidFill>
             <a:schemeClr val="tx1"/>
           </a:solidFill>
@@ -2997,8 +2997,8 @@
           <a:cs typeface="+mn-cs"/>
         </a:defRPr>
       </a:lvl5pPr>
-      <a:lvl6pPr marL="2286000" algn="l" defTabSz="457200" rtl="0" eaLnBrk="1" latinLnBrk="0" hangingPunct="1">
-        <a:defRPr sz="1800" kern="1200">
+      <a:lvl6pPr marL="1044931" algn="l" defTabSz="208986" rtl="0" eaLnBrk="1" latinLnBrk="0" hangingPunct="1">
+        <a:defRPr sz="800" kern="1200">
           <a:solidFill>
             <a:schemeClr val="tx1"/>
           </a:solidFill>
@@ -3007,8 +3007,8 @@
           <a:cs typeface="+mn-cs"/>
         </a:defRPr>
       </a:lvl6pPr>
-      <a:lvl7pPr marL="2743200" algn="l" defTabSz="457200" rtl="0" eaLnBrk="1" latinLnBrk="0" hangingPunct="1">
-        <a:defRPr sz="1800" kern="1200">
+      <a:lvl7pPr marL="1253917" algn="l" defTabSz="208986" rtl="0" eaLnBrk="1" latinLnBrk="0" hangingPunct="1">
+        <a:defRPr sz="800" kern="1200">
           <a:solidFill>
             <a:schemeClr val="tx1"/>
           </a:solidFill>
@@ -3017,8 +3017,8 @@
           <a:cs typeface="+mn-cs"/>
         </a:defRPr>
       </a:lvl7pPr>
-      <a:lvl8pPr marL="3200400" algn="l" defTabSz="457200" rtl="0" eaLnBrk="1" latinLnBrk="0" hangingPunct="1">
-        <a:defRPr sz="1800" kern="1200">
+      <a:lvl8pPr marL="1462903" algn="l" defTabSz="208986" rtl="0" eaLnBrk="1" latinLnBrk="0" hangingPunct="1">
+        <a:defRPr sz="800" kern="1200">
           <a:solidFill>
             <a:schemeClr val="tx1"/>
           </a:solidFill>
@@ -3027,8 +3027,8 @@
           <a:cs typeface="+mn-cs"/>
         </a:defRPr>
       </a:lvl8pPr>
-      <a:lvl9pPr marL="3657600" algn="l" defTabSz="457200" rtl="0" eaLnBrk="1" latinLnBrk="0" hangingPunct="1">
-        <a:defRPr sz="1800" kern="1200">
+      <a:lvl9pPr marL="1671889" algn="l" defTabSz="208986" rtl="0" eaLnBrk="1" latinLnBrk="0" hangingPunct="1">
+        <a:defRPr sz="800" kern="1200">
           <a:solidFill>
             <a:schemeClr val="tx1"/>
           </a:solidFill>
@@ -3043,7 +3043,7 @@
 </file>
 
 <file path=ppt/slides/slide1.xml><?xml version="1.0" encoding="utf-8"?>
-<p:sld xmlns:a="http://schemas.openxmlformats.org/drawingml/2006/main" xmlns:r="http://schemas.openxmlformats.org/officeDocument/2006/relationships" xmlns:mc="http://schemas.openxmlformats.org/markup-compatibility/2006" xmlns:mv="urn:schemas-microsoft-com:mac:vml" xmlns:p="http://schemas.openxmlformats.org/presentationml/2006/main" mc:Ignorable="mv" mc:PreserveAttributes="mv:*">
+<p:sld xmlns:a="http://schemas.openxmlformats.org/drawingml/2006/main" xmlns:r="http://schemas.openxmlformats.org/officeDocument/2006/relationships" xmlns:p="http://schemas.openxmlformats.org/presentationml/2006/main">
   <p:cSld>
     <p:spTree>
       <p:nvGrpSpPr>
@@ -3067,8 +3067,8 @@
         </p:nvSpPr>
         <p:spPr>
           <a:xfrm>
-            <a:off x="1445172" y="245417"/>
-            <a:ext cx="1000234" cy="822960"/>
+            <a:off x="210514" y="318887"/>
+            <a:ext cx="808447" cy="706200"/>
           </a:xfrm>
           <a:prstGeom prst="roundRect">
             <a:avLst/>
@@ -3090,12 +3090,12 @@
           </a:fontRef>
         </p:style>
         <p:txBody>
-          <a:bodyPr/>
+          <a:bodyPr lIns="41797" tIns="20899" rIns="41797" bIns="20899"/>
           <a:lstStyle/>
           <a:p>
             <a:pPr algn="ctr"/>
             <a:r>
-              <a:rPr lang="en-US" sz="1200" dirty="0" smtClean="0"/>
+              <a:rPr lang="en-US" sz="1200" dirty="0"/>
               <a:t>User defined regions</a:t>
             </a:r>
             <a:endParaRPr lang="en-US" sz="1200" dirty="0"/>
@@ -3110,8 +3110,8 @@
         </p:nvSpPr>
         <p:spPr>
           <a:xfrm>
-            <a:off x="1445172" y="1646796"/>
-            <a:ext cx="989549" cy="822960"/>
+            <a:off x="167218" y="1342037"/>
+            <a:ext cx="863998" cy="706200"/>
           </a:xfrm>
           <a:prstGeom prst="roundRect">
             <a:avLst/>
@@ -3133,34 +3133,34 @@
           </a:fontRef>
         </p:style>
         <p:txBody>
-          <a:bodyPr/>
+          <a:bodyPr lIns="41797" tIns="20899" rIns="41797" bIns="20899"/>
           <a:lstStyle/>
           <a:p>
             <a:pPr algn="ctr"/>
             <a:r>
-              <a:rPr lang="en-US" sz="1200" dirty="0" smtClean="0"/>
+              <a:rPr lang="en-US" sz="1200" dirty="0"/>
               <a:t>Gene</a:t>
             </a:r>
           </a:p>
           <a:p>
             <a:pPr algn="ctr"/>
             <a:r>
-              <a:rPr lang="en-US" sz="1200" dirty="0" smtClean="0"/>
+              <a:rPr lang="en-US" sz="1200" dirty="0"/>
               <a:t>boundaries</a:t>
             </a:r>
           </a:p>
           <a:p>
             <a:pPr algn="ctr"/>
             <a:r>
-              <a:rPr lang="en-US" sz="1200" dirty="0" smtClean="0"/>
+              <a:rPr lang="en-US" sz="1200" dirty="0"/>
               <a:t>(</a:t>
             </a:r>
             <a:r>
-              <a:rPr lang="en-US" sz="1200" dirty="0" err="1" smtClean="0"/>
+              <a:rPr lang="en-US" sz="1200" dirty="0" err="1"/>
               <a:t>bp</a:t>
             </a:r>
             <a:r>
-              <a:rPr lang="en-US" sz="1200" dirty="0" smtClean="0"/>
+              <a:rPr lang="en-US" sz="1200" dirty="0"/>
               <a:t>)</a:t>
             </a:r>
             <a:endParaRPr lang="en-US" sz="1200" dirty="0"/>
@@ -3175,8 +3175,8 @@
         </p:nvSpPr>
         <p:spPr>
           <a:xfrm>
-            <a:off x="3004380" y="271692"/>
-            <a:ext cx="1033343" cy="822960"/>
+            <a:off x="1327202" y="332900"/>
+            <a:ext cx="835207" cy="706200"/>
           </a:xfrm>
           <a:prstGeom prst="roundRect">
             <a:avLst/>
@@ -3198,12 +3198,12 @@
           </a:fontRef>
         </p:style>
         <p:txBody>
-          <a:bodyPr/>
+          <a:bodyPr lIns="41797" tIns="20899" rIns="41797" bIns="20899"/>
           <a:lstStyle/>
           <a:p>
             <a:pPr algn="ctr"/>
             <a:r>
-              <a:rPr lang="en-US" sz="1200" dirty="0" smtClean="0"/>
+              <a:rPr lang="en-US" sz="1200" dirty="0"/>
               <a:t>Loop over selected regions</a:t>
             </a:r>
             <a:endParaRPr lang="en-US" sz="1200" dirty="0"/>
@@ -3218,8 +3218,8 @@
         </p:nvSpPr>
         <p:spPr>
           <a:xfrm>
-            <a:off x="4537141" y="271692"/>
-            <a:ext cx="1059618" cy="822960"/>
+            <a:off x="2466734" y="318887"/>
+            <a:ext cx="984176" cy="706200"/>
           </a:xfrm>
           <a:prstGeom prst="roundRect">
             <a:avLst/>
@@ -3241,12 +3241,12 @@
           </a:fontRef>
         </p:style>
         <p:txBody>
-          <a:bodyPr anchor="ctr"/>
+          <a:bodyPr lIns="41797" tIns="20899" rIns="41797" bIns="20899" anchor="ctr"/>
           <a:lstStyle/>
           <a:p>
             <a:pPr algn="ctr"/>
             <a:r>
-              <a:rPr lang="en-US" sz="1200" dirty="0" smtClean="0"/>
+              <a:rPr lang="en-US" sz="1200" dirty="0"/>
               <a:t>Decompress genotypes</a:t>
             </a:r>
             <a:endParaRPr lang="en-US" sz="1200" dirty="0"/>
@@ -3261,8 +3261,8 @@
         </p:nvSpPr>
         <p:spPr>
           <a:xfrm>
-            <a:off x="3004381" y="1646796"/>
-            <a:ext cx="1033342" cy="822960"/>
+            <a:off x="1327202" y="1342037"/>
+            <a:ext cx="835207" cy="706200"/>
           </a:xfrm>
           <a:prstGeom prst="roundRect">
             <a:avLst/>
@@ -3284,13 +3284,13 @@
           </a:fontRef>
         </p:style>
         <p:txBody>
-          <a:bodyPr anchor="ctr"/>
+          <a:bodyPr lIns="41797" tIns="20899" rIns="41797" bIns="20899" anchor="ctr"/>
           <a:lstStyle/>
           <a:p>
             <a:pPr algn="ctr"/>
             <a:r>
-              <a:rPr lang="en-US" sz="1200" dirty="0" smtClean="0"/>
-              <a:t>Loop over some genes</a:t>
+              <a:rPr lang="en-US" sz="1200" dirty="0"/>
+              <a:t>Loop over genes</a:t>
             </a:r>
             <a:endParaRPr lang="en-US" sz="1200" dirty="0"/>
           </a:p>
@@ -3298,14 +3298,14 @@
       </p:sp>
       <p:sp>
         <p:nvSpPr>
-          <p:cNvPr id="9" name="Rounded Rectangle 8"/>
+          <p:cNvPr id="11" name="Rounded Rectangle 10"/>
           <p:cNvSpPr/>
           <p:nvPr/>
         </p:nvSpPr>
         <p:spPr>
           <a:xfrm>
-            <a:off x="4589691" y="1655554"/>
-            <a:ext cx="1007067" cy="822960"/>
+            <a:off x="2567942" y="2534282"/>
+            <a:ext cx="778574" cy="706200"/>
           </a:xfrm>
           <a:prstGeom prst="roundRect">
             <a:avLst/>
@@ -3327,36 +3327,21 @@
           </a:fontRef>
         </p:style>
         <p:txBody>
-          <a:bodyPr/>
+          <a:bodyPr lIns="41797" tIns="20899" rIns="41797" bIns="20899" anchor="t"/>
           <a:lstStyle/>
           <a:p>
             <a:pPr algn="ctr"/>
-            <a:r>
-              <a:rPr lang="en-US" sz="1200" dirty="0" smtClean="0"/>
-              <a:t>Run R</a:t>
-            </a:r>
+            <a:endParaRPr lang="en-US" sz="1200" dirty="0"/>
           </a:p>
           <a:p>
             <a:pPr algn="ctr"/>
             <a:r>
-              <a:rPr lang="en-US" sz="1200" dirty="0" smtClean="0"/>
-              <a:t>package (</a:t>
-            </a:r>
-            <a:r>
-              <a:rPr lang="en-US" sz="1200" dirty="0" err="1" smtClean="0"/>
-              <a:t>eg</a:t>
-            </a:r>
-            <a:r>
-              <a:rPr lang="en-US" sz="1200" dirty="0" smtClean="0"/>
-              <a:t> </a:t>
-            </a:r>
-            <a:r>
-              <a:rPr lang="en-US" sz="1200" dirty="0" err="1" smtClean="0"/>
-              <a:t>pedgene</a:t>
-            </a:r>
-            <a:r>
-              <a:rPr lang="en-US" sz="1200" dirty="0" smtClean="0"/>
-              <a:t>)</a:t>
+              <a:rPr lang="en-US" sz="1200" dirty="0"/>
+              <a:t>Result </a:t>
+            </a:r>
+            <a:r>
+              <a:rPr lang="en-US" sz="1200" dirty="0" err="1"/>
+              <a:t>i</a:t>
             </a:r>
             <a:endParaRPr lang="en-US" sz="1200" dirty="0"/>
           </a:p>
@@ -3364,110 +3349,16 @@
       </p:sp>
       <p:sp>
         <p:nvSpPr>
-          <p:cNvPr id="10" name="Rounded Rectangle 9"/>
-          <p:cNvSpPr/>
+          <p:cNvPr id="17" name="Right Arrow 16"/>
+          <p:cNvSpPr>
+            <a:spLocks noChangeAspect="1"/>
+          </p:cNvSpPr>
           <p:nvPr/>
         </p:nvSpPr>
         <p:spPr>
           <a:xfrm>
-            <a:off x="3004381" y="3109486"/>
-            <a:ext cx="1033342" cy="822960"/>
-          </a:xfrm>
-          <a:prstGeom prst="roundRect">
-            <a:avLst/>
-          </a:prstGeom>
-          <a:ln/>
-        </p:spPr>
-        <p:style>
-          <a:lnRef idx="1">
-            <a:schemeClr val="accent1"/>
-          </a:lnRef>
-          <a:fillRef idx="3">
-            <a:schemeClr val="accent1"/>
-          </a:fillRef>
-          <a:effectRef idx="2">
-            <a:schemeClr val="accent1"/>
-          </a:effectRef>
-          <a:fontRef idx="minor">
-            <a:schemeClr val="lt1"/>
-          </a:fontRef>
-        </p:style>
-        <p:txBody>
-          <a:bodyPr anchor="ctr"/>
-          <a:lstStyle/>
-          <a:p>
-            <a:pPr algn="ctr"/>
-            <a:r>
-              <a:rPr lang="en-US" sz="1200" dirty="0" smtClean="0"/>
-              <a:t>Loop over all genes</a:t>
-            </a:r>
-            <a:endParaRPr lang="en-US" sz="1200" dirty="0"/>
-          </a:p>
-        </p:txBody>
-      </p:sp>
-      <p:sp>
-        <p:nvSpPr>
-          <p:cNvPr id="11" name="Rounded Rectangle 10"/>
-          <p:cNvSpPr/>
-          <p:nvPr/>
-        </p:nvSpPr>
-        <p:spPr>
-          <a:xfrm>
-            <a:off x="4633485" y="3109486"/>
-            <a:ext cx="963274" cy="822960"/>
-          </a:xfrm>
-          <a:prstGeom prst="roundRect">
-            <a:avLst/>
-          </a:prstGeom>
-          <a:ln/>
-        </p:spPr>
-        <p:style>
-          <a:lnRef idx="1">
-            <a:schemeClr val="accent1"/>
-          </a:lnRef>
-          <a:fillRef idx="3">
-            <a:schemeClr val="accent1"/>
-          </a:fillRef>
-          <a:effectRef idx="2">
-            <a:schemeClr val="accent1"/>
-          </a:effectRef>
-          <a:fontRef idx="minor">
-            <a:schemeClr val="lt1"/>
-          </a:fontRef>
-        </p:style>
-        <p:txBody>
-          <a:bodyPr anchor="t"/>
-          <a:lstStyle/>
-          <a:p>
-            <a:pPr algn="ctr"/>
-            <a:endParaRPr lang="en-US" sz="1200" dirty="0" smtClean="0"/>
-          </a:p>
-          <a:p>
-            <a:pPr algn="ctr"/>
-            <a:r>
-              <a:rPr lang="en-US" sz="1200" dirty="0" smtClean="0"/>
-              <a:t>Result </a:t>
-            </a:r>
-            <a:r>
-              <a:rPr lang="en-US" dirty="0" err="1" smtClean="0"/>
-              <a:t>i</a:t>
-            </a:r>
-            <a:endParaRPr lang="en-US" dirty="0"/>
-          </a:p>
-        </p:txBody>
-      </p:sp>
-      <p:sp>
-        <p:nvSpPr>
-          <p:cNvPr id="17" name="Right Arrow 16"/>
-          <p:cNvSpPr>
-            <a:spLocks noChangeAspect="1"/>
-          </p:cNvSpPr>
-          <p:nvPr/>
-        </p:nvSpPr>
-        <p:spPr>
-          <a:xfrm>
-            <a:off x="2584029" y="525753"/>
-            <a:ext cx="271577" cy="271577"/>
+            <a:off x="1067146" y="501824"/>
+            <a:ext cx="219504" cy="292671"/>
           </a:xfrm>
           <a:prstGeom prst="rightArrow">
             <a:avLst/>
@@ -3526,8 +3417,8 @@
         </p:nvSpPr>
         <p:spPr>
           <a:xfrm>
-            <a:off x="4173511" y="547383"/>
-            <a:ext cx="271577" cy="271577"/>
+            <a:off x="2208477" y="513360"/>
+            <a:ext cx="219504" cy="292671"/>
           </a:xfrm>
           <a:prstGeom prst="rightArrow">
             <a:avLst/>
@@ -3586,8 +3477,8 @@
         </p:nvSpPr>
         <p:spPr>
           <a:xfrm>
-            <a:off x="2600640" y="1970021"/>
-            <a:ext cx="271577" cy="271577"/>
+            <a:off x="1069612" y="1514424"/>
+            <a:ext cx="219504" cy="292671"/>
           </a:xfrm>
           <a:prstGeom prst="rightArrow">
             <a:avLst/>
@@ -3646,8 +3537,8 @@
         </p:nvSpPr>
         <p:spPr>
           <a:xfrm rot="5400000">
-            <a:off x="4908271" y="1255926"/>
-            <a:ext cx="271577" cy="271577"/>
+            <a:off x="2831483" y="1074638"/>
+            <a:ext cx="196352" cy="219504"/>
           </a:xfrm>
           <a:prstGeom prst="rightArrow">
             <a:avLst/>
@@ -3706,8 +3597,8 @@
         </p:nvSpPr>
         <p:spPr>
           <a:xfrm rot="5400000">
-            <a:off x="4908271" y="2683582"/>
-            <a:ext cx="271577" cy="271577"/>
+            <a:off x="2795857" y="2193309"/>
+            <a:ext cx="292671" cy="219504"/>
           </a:xfrm>
           <a:prstGeom prst="rightArrow">
             <a:avLst/>
@@ -3758,16 +3649,16 @@
       </p:sp>
       <p:sp>
         <p:nvSpPr>
-          <p:cNvPr id="23" name="Right Arrow 22"/>
+          <p:cNvPr id="24" name="Right Arrow 23"/>
           <p:cNvSpPr>
             <a:spLocks noChangeAspect="1"/>
           </p:cNvSpPr>
           <p:nvPr/>
         </p:nvSpPr>
         <p:spPr>
-          <a:xfrm rot="5400000">
-            <a:off x="3424621" y="2700193"/>
-            <a:ext cx="271577" cy="271577"/>
+          <a:xfrm rot="18900000">
+            <a:off x="2206904" y="1029114"/>
+            <a:ext cx="219504" cy="292671"/>
           </a:xfrm>
           <a:prstGeom prst="rightArrow">
             <a:avLst/>
@@ -3818,16 +3709,66 @@
       </p:sp>
       <p:sp>
         <p:nvSpPr>
-          <p:cNvPr id="24" name="Right Arrow 23"/>
+          <p:cNvPr id="26" name="Magnetic Disk 25"/>
+          <p:cNvSpPr/>
+          <p:nvPr/>
+        </p:nvSpPr>
+        <p:spPr>
+          <a:xfrm>
+            <a:off x="227681" y="2548295"/>
+            <a:ext cx="808447" cy="706200"/>
+          </a:xfrm>
+          <a:prstGeom prst="flowChartMagneticDisk">
+            <a:avLst/>
+          </a:prstGeom>
+          <a:ln/>
+        </p:spPr>
+        <p:style>
+          <a:lnRef idx="1">
+            <a:schemeClr val="accent1"/>
+          </a:lnRef>
+          <a:fillRef idx="3">
+            <a:schemeClr val="accent1"/>
+          </a:fillRef>
+          <a:effectRef idx="2">
+            <a:schemeClr val="accent1"/>
+          </a:effectRef>
+          <a:fontRef idx="minor">
+            <a:schemeClr val="lt1"/>
+          </a:fontRef>
+        </p:style>
+        <p:txBody>
+          <a:bodyPr lIns="41797" tIns="20899" rIns="41797" bIns="20899" anchor="ctr"/>
+          <a:lstStyle/>
+          <a:p>
+            <a:pPr algn="ctr"/>
+            <a:r>
+              <a:rPr lang="en-US" sz="1200" dirty="0"/>
+              <a:t>Reference</a:t>
+            </a:r>
+          </a:p>
+          <a:p>
+            <a:pPr algn="ctr"/>
+            <a:r>
+              <a:rPr lang="en-US" sz="1200" dirty="0"/>
+              <a:t>Database</a:t>
+            </a:r>
+            <a:endParaRPr lang="en-US" sz="1200" dirty="0"/>
+          </a:p>
+        </p:txBody>
+      </p:sp>
+      <p:sp>
+        <p:nvSpPr>
+          <p:cNvPr id="28" name="Right Arrow 27"/>
           <p:cNvSpPr>
             <a:spLocks noChangeAspect="1"/>
           </p:cNvSpPr>
           <p:nvPr/>
         </p:nvSpPr>
         <p:spPr>
-          <a:xfrm rot="18900000">
-            <a:off x="4173511" y="1511007"/>
-            <a:ext cx="271577" cy="271577"/>
+          <a:xfrm rot="16200000">
+            <a:off x="470525" y="2169719"/>
+            <a:ext cx="292671" cy="219504"/>
           </a:xfrm>
           <a:prstGeom prst="rightArrow">
             <a:avLst/>
@@ -3878,16 +3819,16 @@
       </p:sp>
       <p:sp>
         <p:nvSpPr>
-          <p:cNvPr id="26" name="Magnetic Disk 25"/>
+          <p:cNvPr id="25" name="Rounded Rectangle 24"/>
           <p:cNvSpPr/>
           <p:nvPr/>
         </p:nvSpPr>
         <p:spPr>
           <a:xfrm>
-            <a:off x="1488090" y="3109486"/>
-            <a:ext cx="1000234" cy="822960"/>
+            <a:off x="2526046" y="1356531"/>
+            <a:ext cx="835207" cy="706200"/>
           </a:xfrm>
-          <a:prstGeom prst="flowChartMagneticDisk">
+          <a:prstGeom prst="roundRect">
             <a:avLst/>
           </a:prstGeom>
           <a:ln/>
@@ -3907,152 +3848,15 @@
           </a:fontRef>
         </p:style>
         <p:txBody>
-          <a:bodyPr anchor="ctr"/>
+          <a:bodyPr lIns="41797" tIns="20899" rIns="41797" bIns="20899" anchor="ctr"/>
           <a:lstStyle/>
           <a:p>
             <a:pPr algn="ctr"/>
             <a:r>
               <a:rPr lang="en-US" sz="1200" dirty="0" smtClean="0"/>
-              <a:t>Reference</a:t>
-            </a:r>
-          </a:p>
-          <a:p>
-            <a:pPr algn="ctr"/>
-            <a:r>
-              <a:rPr lang="en-US" sz="1200" dirty="0" smtClean="0"/>
-              <a:t>Database</a:t>
+              <a:t>Run R function</a:t>
             </a:r>
             <a:endParaRPr lang="en-US" sz="1200" dirty="0"/>
-          </a:p>
-        </p:txBody>
-      </p:sp>
-      <p:sp>
-        <p:nvSpPr>
-          <p:cNvPr id="28" name="Right Arrow 27"/>
-          <p:cNvSpPr>
-            <a:spLocks noChangeAspect="1"/>
-          </p:cNvSpPr>
-          <p:nvPr/>
-        </p:nvSpPr>
-        <p:spPr>
-          <a:xfrm rot="16200000">
-            <a:off x="1852418" y="2683581"/>
-            <a:ext cx="271577" cy="271577"/>
-          </a:xfrm>
-          <a:prstGeom prst="rightArrow">
-            <a:avLst/>
-          </a:prstGeom>
-          <a:gradFill>
-            <a:gsLst>
-              <a:gs pos="47000">
-                <a:schemeClr val="accent1">
-                  <a:tint val="100000"/>
-                  <a:shade val="100000"/>
-                  <a:satMod val="130000"/>
-                  <a:alpha val="47000"/>
-                </a:schemeClr>
-              </a:gs>
-              <a:gs pos="100000">
-                <a:schemeClr val="accent1">
-                  <a:tint val="50000"/>
-                  <a:shade val="100000"/>
-                  <a:satMod val="350000"/>
-                </a:schemeClr>
-              </a:gs>
-            </a:gsLst>
-          </a:gradFill>
-          <a:ln>
-            <a:solidFill>
-              <a:schemeClr val="accent1">
-                <a:shade val="95000"/>
-                <a:satMod val="105000"/>
-                <a:alpha val="49000"/>
-              </a:schemeClr>
-            </a:solidFill>
-          </a:ln>
-        </p:spPr>
-        <p:style>
-          <a:lnRef idx="1">
-            <a:schemeClr val="accent1"/>
-          </a:lnRef>
-          <a:fillRef idx="3">
-            <a:schemeClr val="accent1"/>
-          </a:fillRef>
-          <a:effectRef idx="2">
-            <a:schemeClr val="accent1"/>
-          </a:effectRef>
-          <a:fontRef idx="minor">
-            <a:schemeClr val="lt1"/>
-          </a:fontRef>
-        </p:style>
-      </p:sp>
-      <p:sp>
-        <p:nvSpPr>
-          <p:cNvPr id="29" name="TextBox 28"/>
-          <p:cNvSpPr txBox="1"/>
-          <p:nvPr/>
-        </p:nvSpPr>
-        <p:spPr>
-          <a:xfrm>
-            <a:off x="1488090" y="4230414"/>
-            <a:ext cx="2086252" cy="369332"/>
-          </a:xfrm>
-          <a:prstGeom prst="rect">
-            <a:avLst/>
-          </a:prstGeom>
-          <a:noFill/>
-        </p:spPr>
-        <p:txBody>
-          <a:bodyPr wrap="square" rtlCol="0">
-            <a:spAutoFit/>
-          </a:bodyPr>
-          <a:lstStyle/>
-          <a:p>
-            <a:r>
-              <a:rPr lang="en-US" dirty="0" smtClean="0"/>
-              <a:t>Iteration </a:t>
-            </a:r>
-            <a:r>
-              <a:rPr lang="en-US" dirty="0" smtClean="0"/>
-              <a:t>wrapper.</a:t>
-            </a:r>
-            <a:endParaRPr lang="en-US" dirty="0"/>
-          </a:p>
-        </p:txBody>
-      </p:sp>
-      <p:sp>
-        <p:nvSpPr>
-          <p:cNvPr id="30" name="TextBox 29"/>
-          <p:cNvSpPr txBox="1"/>
-          <p:nvPr/>
-        </p:nvSpPr>
-        <p:spPr>
-          <a:xfrm>
-            <a:off x="1488089" y="4599746"/>
-            <a:ext cx="6438463" cy="923330"/>
-          </a:xfrm>
-          <a:prstGeom prst="rect">
-            <a:avLst/>
-          </a:prstGeom>
-          <a:noFill/>
-        </p:spPr>
-        <p:txBody>
-          <a:bodyPr wrap="square" rtlCol="0">
-            <a:spAutoFit/>
-          </a:bodyPr>
-          <a:lstStyle/>
-          <a:p>
-            <a:r>
-              <a:rPr lang="en-US" dirty="0" smtClean="0"/>
-              <a:t>Extensive efficient flexible wrapper to iterate through gene regions.</a:t>
-            </a:r>
-          </a:p>
-          <a:p>
-            <a:r>
-              <a:rPr lang="en-US" dirty="0" smtClean="0"/>
-              <a:t>This wrapper can run R functions, which analyze only a single region at a time, on multiple genes.</a:t>
-            </a:r>
-            <a:endParaRPr lang="en-US" dirty="0"/>
           </a:p>
         </p:txBody>
       </p:sp>
@@ -4064,7 +3868,7 @@
   <p:timing>
     <p:tnLst>
       <p:par>
-        <p:cTn id="1" dur="indefinite" restart="never" nodeType="tmRoot"/>
+        <p:cTn xmlns:p14="http://schemas.microsoft.com/office/powerpoint/2010/main" id="1" dur="indefinite" restart="never" nodeType="tmRoot"/>
       </p:par>
     </p:tnLst>
   </p:timing>
